--- a/results/figures/site_maps.pptx
+++ b/results/figures/site_maps.pptx
@@ -54178,8 +54178,8 @@
           </p:nvSpPr>
           <p:spPr>
             <a:xfrm>
-              <a:off x="3703093" y="4884942"/>
-              <a:ext cx="90303" cy="90303"/>
+              <a:off x="3675992" y="4857840"/>
+              <a:ext cx="144506" cy="144506"/>
             </a:xfrm>
             <a:prstGeom prst="ellipse">
               <a:avLst/>
@@ -54213,8 +54213,8 @@
           </p:nvSpPr>
           <p:spPr>
             <a:xfrm>
-              <a:off x="4870974" y="4341281"/>
-              <a:ext cx="90303" cy="90303"/>
+              <a:off x="4843873" y="4314179"/>
+              <a:ext cx="144506" cy="144506"/>
             </a:xfrm>
             <a:prstGeom prst="ellipse">
               <a:avLst/>
@@ -54248,8 +54248,8 @@
           </p:nvSpPr>
           <p:spPr>
             <a:xfrm>
-              <a:off x="3091945" y="4889443"/>
-              <a:ext cx="90303" cy="90303"/>
+              <a:off x="3064844" y="4862342"/>
+              <a:ext cx="144506" cy="144506"/>
             </a:xfrm>
             <a:prstGeom prst="ellipse">
               <a:avLst/>
@@ -54283,8 +54283,8 @@
           </p:nvSpPr>
           <p:spPr>
             <a:xfrm>
-              <a:off x="2844018" y="5101831"/>
-              <a:ext cx="90303" cy="90303"/>
+              <a:off x="2816917" y="5074729"/>
+              <a:ext cx="144506" cy="144506"/>
             </a:xfrm>
             <a:prstGeom prst="ellipse">
               <a:avLst/>
@@ -54318,8 +54318,8 @@
           </p:nvSpPr>
           <p:spPr>
             <a:xfrm>
-              <a:off x="4662798" y="4552358"/>
-              <a:ext cx="90303" cy="90303"/>
+              <a:off x="4635697" y="4525257"/>
+              <a:ext cx="144506" cy="144506"/>
             </a:xfrm>
             <a:prstGeom prst="ellipse">
               <a:avLst/>
@@ -54353,8 +54353,8 @@
           </p:nvSpPr>
           <p:spPr>
             <a:xfrm>
-              <a:off x="4651641" y="4556178"/>
-              <a:ext cx="90303" cy="90303"/>
+              <a:off x="4624539" y="4529077"/>
+              <a:ext cx="144506" cy="144506"/>
             </a:xfrm>
             <a:prstGeom prst="ellipse">
               <a:avLst/>
@@ -54388,8 +54388,8 @@
           </p:nvSpPr>
           <p:spPr>
             <a:xfrm>
-              <a:off x="3644728" y="4915794"/>
-              <a:ext cx="90303" cy="90303"/>
+              <a:off x="3617627" y="4888692"/>
+              <a:ext cx="144506" cy="144506"/>
             </a:xfrm>
             <a:prstGeom prst="ellipse">
               <a:avLst/>
@@ -54423,8 +54423,8 @@
           </p:nvSpPr>
           <p:spPr>
             <a:xfrm>
-              <a:off x="2950412" y="5018090"/>
-              <a:ext cx="90303" cy="90303"/>
+              <a:off x="2923311" y="4990989"/>
+              <a:ext cx="144506" cy="144506"/>
             </a:xfrm>
             <a:prstGeom prst="ellipse">
               <a:avLst/>
@@ -54458,8 +54458,8 @@
           </p:nvSpPr>
           <p:spPr>
             <a:xfrm>
-              <a:off x="5251239" y="3767724"/>
-              <a:ext cx="90303" cy="90303"/>
+              <a:off x="5224138" y="3740622"/>
+              <a:ext cx="144506" cy="144506"/>
             </a:xfrm>
             <a:prstGeom prst="ellipse">
               <a:avLst/>
@@ -54493,8 +54493,8 @@
           </p:nvSpPr>
           <p:spPr>
             <a:xfrm>
-              <a:off x="4620972" y="4636357"/>
-              <a:ext cx="90303" cy="90303"/>
+              <a:off x="4593871" y="4609255"/>
+              <a:ext cx="144506" cy="144506"/>
             </a:xfrm>
             <a:prstGeom prst="ellipse">
               <a:avLst/>
@@ -54528,8 +54528,8 @@
           </p:nvSpPr>
           <p:spPr>
             <a:xfrm>
-              <a:off x="4613430" y="4631348"/>
-              <a:ext cx="90303" cy="90303"/>
+              <a:off x="4586328" y="4604247"/>
+              <a:ext cx="144506" cy="144506"/>
             </a:xfrm>
             <a:prstGeom prst="ellipse">
               <a:avLst/>
@@ -54563,8 +54563,8 @@
           </p:nvSpPr>
           <p:spPr>
             <a:xfrm>
-              <a:off x="3455820" y="4916357"/>
-              <a:ext cx="90303" cy="90303"/>
+              <a:off x="3428718" y="4889256"/>
+              <a:ext cx="144506" cy="144506"/>
             </a:xfrm>
             <a:prstGeom prst="ellipse">
               <a:avLst/>
@@ -54598,8 +54598,8 @@
           </p:nvSpPr>
           <p:spPr>
             <a:xfrm>
-              <a:off x="3544878" y="4941534"/>
-              <a:ext cx="90303" cy="90303"/>
+              <a:off x="3517777" y="4914433"/>
+              <a:ext cx="144506" cy="144506"/>
             </a:xfrm>
             <a:prstGeom prst="ellipse">
               <a:avLst/>
@@ -54633,8 +54633,8 @@
           </p:nvSpPr>
           <p:spPr>
             <a:xfrm>
-              <a:off x="4777436" y="4449350"/>
-              <a:ext cx="90303" cy="90303"/>
+              <a:off x="4750334" y="4422249"/>
+              <a:ext cx="144506" cy="144506"/>
             </a:xfrm>
             <a:prstGeom prst="ellipse">
               <a:avLst/>
@@ -54668,8 +54668,8 @@
           </p:nvSpPr>
           <p:spPr>
             <a:xfrm>
-              <a:off x="3275559" y="4856748"/>
-              <a:ext cx="90303" cy="90303"/>
+              <a:off x="3248458" y="4829646"/>
+              <a:ext cx="144506" cy="144506"/>
             </a:xfrm>
             <a:prstGeom prst="ellipse">
               <a:avLst/>
@@ -54703,8 +54703,8 @@
           </p:nvSpPr>
           <p:spPr>
             <a:xfrm>
-              <a:off x="5783085" y="3005828"/>
-              <a:ext cx="90303" cy="90303"/>
+              <a:off x="5755984" y="2978727"/>
+              <a:ext cx="144506" cy="144506"/>
             </a:xfrm>
             <a:prstGeom prst="ellipse">
               <a:avLst/>
@@ -54738,8 +54738,8 @@
           </p:nvSpPr>
           <p:spPr>
             <a:xfrm>
-              <a:off x="5722490" y="3222851"/>
-              <a:ext cx="90303" cy="90303"/>
+              <a:off x="5695389" y="3195750"/>
+              <a:ext cx="144506" cy="144506"/>
             </a:xfrm>
             <a:prstGeom prst="ellipse">
               <a:avLst/>
@@ -54773,8 +54773,8 @@
           </p:nvSpPr>
           <p:spPr>
             <a:xfrm>
-              <a:off x="5724182" y="3215289"/>
-              <a:ext cx="90303" cy="90303"/>
+              <a:off x="5697081" y="3188187"/>
+              <a:ext cx="144506" cy="144506"/>
             </a:xfrm>
             <a:prstGeom prst="ellipse">
               <a:avLst/>
@@ -54808,8 +54808,8 @@
           </p:nvSpPr>
           <p:spPr>
             <a:xfrm>
-              <a:off x="4605237" y="4773366"/>
-              <a:ext cx="90303" cy="90303"/>
+              <a:off x="4578135" y="4746265"/>
+              <a:ext cx="144506" cy="144506"/>
             </a:xfrm>
             <a:prstGeom prst="ellipse">
               <a:avLst/>
@@ -54843,8 +54843,8 @@
           </p:nvSpPr>
           <p:spPr>
             <a:xfrm>
-              <a:off x="3835068" y="4782789"/>
-              <a:ext cx="90303" cy="90303"/>
+              <a:off x="3807967" y="4755688"/>
+              <a:ext cx="144506" cy="144506"/>
             </a:xfrm>
             <a:prstGeom prst="ellipse">
               <a:avLst/>
@@ -54878,8 +54878,8 @@
           </p:nvSpPr>
           <p:spPr>
             <a:xfrm>
-              <a:off x="5791476" y="3048149"/>
-              <a:ext cx="90303" cy="90303"/>
+              <a:off x="5764374" y="3021048"/>
+              <a:ext cx="144506" cy="144506"/>
             </a:xfrm>
             <a:prstGeom prst="ellipse">
               <a:avLst/>
@@ -54913,8 +54913,8 @@
           </p:nvSpPr>
           <p:spPr>
             <a:xfrm>
-              <a:off x="5335275" y="3563560"/>
-              <a:ext cx="90303" cy="90303"/>
+              <a:off x="5308174" y="3536459"/>
+              <a:ext cx="144506" cy="144506"/>
             </a:xfrm>
             <a:prstGeom prst="ellipse">
               <a:avLst/>
@@ -54948,8 +54948,8 @@
           </p:nvSpPr>
           <p:spPr>
             <a:xfrm>
-              <a:off x="5267689" y="3512956"/>
-              <a:ext cx="90303" cy="90303"/>
+              <a:off x="5240587" y="3485855"/>
+              <a:ext cx="144506" cy="144506"/>
             </a:xfrm>
             <a:prstGeom prst="ellipse">
               <a:avLst/>
@@ -54983,8 +54983,8 @@
           </p:nvSpPr>
           <p:spPr>
             <a:xfrm>
-              <a:off x="6342754" y="2899508"/>
-              <a:ext cx="90303" cy="90303"/>
+              <a:off x="6315652" y="2872406"/>
+              <a:ext cx="144506" cy="144506"/>
             </a:xfrm>
             <a:prstGeom prst="ellipse">
               <a:avLst/>
@@ -55018,8 +55018,8 @@
           </p:nvSpPr>
           <p:spPr>
             <a:xfrm>
-              <a:off x="6343849" y="2897409"/>
-              <a:ext cx="90303" cy="90303"/>
+              <a:off x="6316748" y="2870308"/>
+              <a:ext cx="144506" cy="144506"/>
             </a:xfrm>
             <a:prstGeom prst="ellipse">
               <a:avLst/>
@@ -55053,8 +55053,8 @@
           </p:nvSpPr>
           <p:spPr>
             <a:xfrm>
-              <a:off x="3208395" y="4865154"/>
-              <a:ext cx="90303" cy="90303"/>
+              <a:off x="3181293" y="4838053"/>
+              <a:ext cx="144506" cy="144506"/>
             </a:xfrm>
             <a:prstGeom prst="ellipse">
               <a:avLst/>
@@ -55088,8 +55088,8 @@
           </p:nvSpPr>
           <p:spPr>
             <a:xfrm>
-              <a:off x="5150647" y="3845186"/>
-              <a:ext cx="90303" cy="90303"/>
+              <a:off x="5123546" y="3818085"/>
+              <a:ext cx="144506" cy="144506"/>
             </a:xfrm>
             <a:prstGeom prst="ellipse">
               <a:avLst/>
@@ -55123,8 +55123,8 @@
           </p:nvSpPr>
           <p:spPr>
             <a:xfrm>
-              <a:off x="5142505" y="3833267"/>
-              <a:ext cx="90303" cy="90303"/>
+              <a:off x="5115404" y="3806165"/>
+              <a:ext cx="144506" cy="144506"/>
             </a:xfrm>
             <a:prstGeom prst="ellipse">
               <a:avLst/>
@@ -55158,8 +55158,8 @@
           </p:nvSpPr>
           <p:spPr>
             <a:xfrm>
-              <a:off x="5264014" y="4023139"/>
-              <a:ext cx="90303" cy="90303"/>
+              <a:off x="5236913" y="3996038"/>
+              <a:ext cx="144506" cy="144506"/>
             </a:xfrm>
             <a:prstGeom prst="ellipse">
               <a:avLst/>
@@ -55193,8 +55193,8 @@
           </p:nvSpPr>
           <p:spPr>
             <a:xfrm>
-              <a:off x="6681072" y="2572527"/>
-              <a:ext cx="90303" cy="90303"/>
+              <a:off x="6653971" y="2545426"/>
+              <a:ext cx="144506" cy="144506"/>
             </a:xfrm>
             <a:prstGeom prst="ellipse">
               <a:avLst/>
@@ -55228,8 +55228,8 @@
           </p:nvSpPr>
           <p:spPr>
             <a:xfrm>
-              <a:off x="5104327" y="3666783"/>
-              <a:ext cx="90303" cy="90303"/>
+              <a:off x="5077225" y="3639682"/>
+              <a:ext cx="144506" cy="144506"/>
             </a:xfrm>
             <a:prstGeom prst="ellipse">
               <a:avLst/>
@@ -55263,8 +55263,8 @@
           </p:nvSpPr>
           <p:spPr>
             <a:xfrm>
-              <a:off x="5937468" y="2869795"/>
-              <a:ext cx="90303" cy="90303"/>
+              <a:off x="5910367" y="2842694"/>
+              <a:ext cx="144506" cy="144506"/>
             </a:xfrm>
             <a:prstGeom prst="ellipse">
               <a:avLst/>
@@ -55298,8 +55298,8 @@
           </p:nvSpPr>
           <p:spPr>
             <a:xfrm>
-              <a:off x="5894575" y="2896863"/>
-              <a:ext cx="90303" cy="90303"/>
+              <a:off x="5867473" y="2869761"/>
+              <a:ext cx="144506" cy="144506"/>
             </a:xfrm>
             <a:prstGeom prst="ellipse">
               <a:avLst/>
@@ -55333,8 +55333,8 @@
           </p:nvSpPr>
           <p:spPr>
             <a:xfrm>
-              <a:off x="5005068" y="4254863"/>
-              <a:ext cx="90303" cy="90303"/>
+              <a:off x="4977967" y="4227762"/>
+              <a:ext cx="144506" cy="144506"/>
             </a:xfrm>
             <a:prstGeom prst="ellipse">
               <a:avLst/>
@@ -55368,8 +55368,8 @@
           </p:nvSpPr>
           <p:spPr>
             <a:xfrm>
-              <a:off x="4996316" y="4280302"/>
-              <a:ext cx="90303" cy="90303"/>
+              <a:off x="4969215" y="4253201"/>
+              <a:ext cx="144506" cy="144506"/>
             </a:xfrm>
             <a:prstGeom prst="ellipse">
               <a:avLst/>
@@ -55403,8 +55403,8 @@
           </p:nvSpPr>
           <p:spPr>
             <a:xfrm>
-              <a:off x="5522979" y="3273097"/>
-              <a:ext cx="90303" cy="90303"/>
+              <a:off x="5495878" y="3245996"/>
+              <a:ext cx="144506" cy="144506"/>
             </a:xfrm>
             <a:prstGeom prst="ellipse">
               <a:avLst/>
@@ -55438,8 +55438,8 @@
           </p:nvSpPr>
           <p:spPr>
             <a:xfrm>
-              <a:off x="4181724" y="4878591"/>
-              <a:ext cx="90303" cy="90303"/>
+              <a:off x="4154622" y="4851490"/>
+              <a:ext cx="144506" cy="144506"/>
             </a:xfrm>
             <a:prstGeom prst="ellipse">
               <a:avLst/>
@@ -55473,8 +55473,8 @@
           </p:nvSpPr>
           <p:spPr>
             <a:xfrm>
-              <a:off x="4230005" y="4877670"/>
-              <a:ext cx="90303" cy="90303"/>
+              <a:off x="4202904" y="4850569"/>
+              <a:ext cx="144506" cy="144506"/>
             </a:xfrm>
             <a:prstGeom prst="ellipse">
               <a:avLst/>
@@ -55508,8 +55508,8 @@
           </p:nvSpPr>
           <p:spPr>
             <a:xfrm>
-              <a:off x="5595680" y="3255503"/>
-              <a:ext cx="90303" cy="90303"/>
+              <a:off x="5568579" y="3228402"/>
+              <a:ext cx="144506" cy="144506"/>
             </a:xfrm>
             <a:prstGeom prst="ellipse">
               <a:avLst/>
@@ -55543,8 +55543,8 @@
           </p:nvSpPr>
           <p:spPr>
             <a:xfrm>
-              <a:off x="2846145" y="5108635"/>
-              <a:ext cx="80029" cy="80029"/>
+              <a:off x="2822127" y="5084617"/>
+              <a:ext cx="128065" cy="128065"/>
             </a:xfrm>
             <a:prstGeom prst="rect">
               <a:avLst/>
@@ -55578,8 +55578,8 @@
           </p:nvSpPr>
           <p:spPr>
             <a:xfrm>
-              <a:off x="3548924" y="4945376"/>
-              <a:ext cx="80029" cy="80029"/>
+              <a:off x="3524907" y="4921359"/>
+              <a:ext cx="128065" cy="128065"/>
             </a:xfrm>
             <a:prstGeom prst="rect">
               <a:avLst/>
@@ -55613,8 +55613,8 @@
           </p:nvSpPr>
           <p:spPr>
             <a:xfrm>
-              <a:off x="4610071" y="4778345"/>
-              <a:ext cx="80029" cy="80029"/>
+              <a:off x="4586054" y="4754327"/>
+              <a:ext cx="128065" cy="128065"/>
             </a:xfrm>
             <a:prstGeom prst="rect">
               <a:avLst/>
@@ -55648,8 +55648,8 @@
           </p:nvSpPr>
           <p:spPr>
             <a:xfrm>
-              <a:off x="5130692" y="3829699"/>
-              <a:ext cx="80029" cy="80029"/>
+              <a:off x="5106674" y="3805681"/>
+              <a:ext cx="128065" cy="128065"/>
             </a:xfrm>
             <a:prstGeom prst="rect">
               <a:avLst/>
@@ -55683,8 +55683,8 @@
           </p:nvSpPr>
           <p:spPr>
             <a:xfrm>
-              <a:off x="5167074" y="3721898"/>
-              <a:ext cx="80029" cy="80029"/>
+              <a:off x="5143057" y="3697881"/>
+              <a:ext cx="128065" cy="128065"/>
             </a:xfrm>
             <a:prstGeom prst="rect">
               <a:avLst/>
@@ -55718,8 +55718,8 @@
           </p:nvSpPr>
           <p:spPr>
             <a:xfrm>
-              <a:off x="5162881" y="3824615"/>
-              <a:ext cx="80029" cy="80029"/>
+              <a:off x="5138863" y="3800597"/>
+              <a:ext cx="128065" cy="128065"/>
             </a:xfrm>
             <a:prstGeom prst="rect">
               <a:avLst/>
@@ -55753,8 +55753,8 @@
           </p:nvSpPr>
           <p:spPr>
             <a:xfrm>
-              <a:off x="5788193" y="3011154"/>
-              <a:ext cx="80029" cy="80029"/>
+              <a:off x="5764175" y="2987136"/>
+              <a:ext cx="128065" cy="128065"/>
             </a:xfrm>
             <a:prstGeom prst="rect">
               <a:avLst/>
@@ -55788,8 +55788,8 @@
           </p:nvSpPr>
           <p:spPr>
             <a:xfrm>
-              <a:off x="5940595" y="2880330"/>
-              <a:ext cx="80029" cy="80029"/>
+              <a:off x="5916577" y="2856313"/>
+              <a:ext cx="128065" cy="128065"/>
             </a:xfrm>
             <a:prstGeom prst="rect">
               <a:avLst/>
@@ -55823,18 +55823,18 @@
           </p:nvSpPr>
           <p:spPr>
             <a:xfrm>
-              <a:off x="2882274" y="5161877"/>
-              <a:ext cx="3006" cy="45251"/>
+              <a:off x="2882250" y="4927853"/>
+              <a:ext cx="3674" cy="207552"/>
             </a:xfrm>
             <a:custGeom>
               <a:avLst/>
               <a:pathLst>
-                <a:path w="3006" h="45251">
+                <a:path w="3674" h="207552">
                   <a:moveTo>
-                    <a:pt x="0" y="45251"/>
+                    <a:pt x="0" y="0"/>
                   </a:moveTo>
                   <a:lnTo>
-                    <a:pt x="3006" y="0"/>
+                    <a:pt x="3674" y="207552"/>
                   </a:lnTo>
                 </a:path>
               </a:pathLst>
@@ -55863,18 +55863,18 @@
           </p:nvSpPr>
           <p:spPr>
             <a:xfrm>
-              <a:off x="3600056" y="4926956"/>
-              <a:ext cx="56032" cy="48761"/>
+              <a:off x="3459099" y="4644472"/>
+              <a:ext cx="125021" cy="328267"/>
             </a:xfrm>
             <a:custGeom>
               <a:avLst/>
               <a:pathLst>
-                <a:path w="56032" h="48761">
+                <a:path w="125021" h="328267">
                   <a:moveTo>
-                    <a:pt x="56032" y="0"/>
+                    <a:pt x="0" y="0"/>
                   </a:moveTo>
                   <a:lnTo>
-                    <a:pt x="0" y="48761"/>
+                    <a:pt x="125021" y="328267"/>
                   </a:lnTo>
                 </a:path>
               </a:pathLst>
@@ -55903,18 +55903,18 @@
           </p:nvSpPr>
           <p:spPr>
             <a:xfrm>
-              <a:off x="4661204" y="4760090"/>
-              <a:ext cx="55850" cy="48595"/>
+              <a:off x="4468118" y="4564007"/>
+              <a:ext cx="173779" cy="242905"/>
             </a:xfrm>
             <a:custGeom>
               <a:avLst/>
               <a:pathLst>
-                <a:path w="55850" h="48595">
+                <a:path w="173779" h="242905">
                   <a:moveTo>
-                    <a:pt x="55850" y="0"/>
+                    <a:pt x="0" y="0"/>
                   </a:moveTo>
                   <a:lnTo>
-                    <a:pt x="0" y="48595"/>
+                    <a:pt x="173779" y="242905"/>
                   </a:lnTo>
                 </a:path>
               </a:pathLst>
@@ -55943,18 +55943,18 @@
           </p:nvSpPr>
           <p:spPr>
             <a:xfrm>
-              <a:off x="5760762" y="3060845"/>
-              <a:ext cx="56330" cy="49037"/>
+              <a:off x="5785191" y="2838477"/>
+              <a:ext cx="40372" cy="199621"/>
             </a:xfrm>
             <a:custGeom>
               <a:avLst/>
               <a:pathLst>
-                <a:path w="56330" h="49037">
+                <a:path w="40372" h="199621">
                   <a:moveTo>
-                    <a:pt x="0" y="49037"/>
+                    <a:pt x="0" y="0"/>
                   </a:moveTo>
                   <a:lnTo>
-                    <a:pt x="56330" y="0"/>
+                    <a:pt x="40372" y="199621"/>
                   </a:lnTo>
                 </a:path>
               </a:pathLst>
@@ -55983,18 +55983,18 @@
           </p:nvSpPr>
           <p:spPr>
             <a:xfrm>
-              <a:off x="5991724" y="2861646"/>
-              <a:ext cx="56314" cy="49023"/>
+              <a:off x="5864123" y="2615021"/>
+              <a:ext cx="111659" cy="292673"/>
             </a:xfrm>
             <a:custGeom>
               <a:avLst/>
               <a:pathLst>
-                <a:path w="56314" h="49023">
+                <a:path w="111659" h="292673">
                   <a:moveTo>
-                    <a:pt x="56314" y="0"/>
+                    <a:pt x="0" y="0"/>
                   </a:moveTo>
                   <a:lnTo>
-                    <a:pt x="0" y="49023"/>
+                    <a:pt x="111659" y="292673"/>
                   </a:lnTo>
                 </a:path>
               </a:pathLst>
@@ -56023,7 +56023,7 @@
           </p:nvSpPr>
           <p:spPr>
             <a:xfrm>
-              <a:off x="2618647" y="5207128"/>
+              <a:off x="2618628" y="4735921"/>
               <a:ext cx="527243" cy="191932"/>
             </a:xfrm>
             <a:custGeom>
@@ -56070,7 +56070,7 @@
                     <a:pt x="527243" y="164500"/>
                   </a:lnTo>
                   <a:lnTo>
-                    <a:pt x="527243" y="27431"/>
+                    <a:pt x="527243" y="27432"/>
                   </a:lnTo>
                   <a:lnTo>
                     <a:pt x="526887" y="23031"/>
@@ -56139,7 +56139,7 @@
                     <a:pt x="88" y="25224"/>
                   </a:lnTo>
                   <a:lnTo>
-                    <a:pt x="0" y="27431"/>
+                    <a:pt x="0" y="27432"/>
                   </a:lnTo>
                   <a:lnTo>
                     <a:pt x="0" y="164500"/>
@@ -56210,7 +56210,7 @@
           </p:nvSpPr>
           <p:spPr>
             <a:xfrm>
-              <a:off x="2664367" y="5252848"/>
+              <a:off x="2664348" y="4781641"/>
               <a:ext cx="435803" cy="100492"/>
             </a:xfrm>
             <a:prstGeom prst="rect">
@@ -56256,7 +56256,7 @@
           </p:nvSpPr>
           <p:spPr>
             <a:xfrm>
-              <a:off x="3518863" y="4735023"/>
+              <a:off x="3192592" y="4452539"/>
               <a:ext cx="519562" cy="191932"/>
             </a:xfrm>
             <a:custGeom>
@@ -56264,7 +56264,7 @@
               <a:pathLst>
                 <a:path w="519562" h="191932">
                   <a:moveTo>
-                    <a:pt x="27432" y="191932"/>
+                    <a:pt x="27431" y="191932"/>
                   </a:moveTo>
                   <a:lnTo>
                     <a:pt x="492130" y="191932"/>
@@ -56303,7 +56303,7 @@
                     <a:pt x="519562" y="164500"/>
                   </a:lnTo>
                   <a:lnTo>
-                    <a:pt x="519562" y="27432"/>
+                    <a:pt x="519562" y="27431"/>
                   </a:lnTo>
                   <a:lnTo>
                     <a:pt x="519206" y="23031"/>
@@ -56336,7 +56336,7 @@
                     <a:pt x="492130" y="0"/>
                   </a:lnTo>
                   <a:lnTo>
-                    <a:pt x="27432" y="0"/>
+                    <a:pt x="27431" y="0"/>
                   </a:lnTo>
                   <a:lnTo>
                     <a:pt x="30738" y="200"/>
@@ -56372,7 +56372,7 @@
                     <a:pt x="88" y="25224"/>
                   </a:lnTo>
                   <a:lnTo>
-                    <a:pt x="0" y="27432"/>
+                    <a:pt x="0" y="27431"/>
                   </a:lnTo>
                   <a:lnTo>
                     <a:pt x="0" y="164500"/>
@@ -56443,7 +56443,7 @@
           </p:nvSpPr>
           <p:spPr>
             <a:xfrm>
-              <a:off x="3564583" y="4780743"/>
+              <a:off x="3238312" y="4498259"/>
               <a:ext cx="428122" cy="100492"/>
             </a:xfrm>
             <a:prstGeom prst="rect">
@@ -56489,7 +56489,7 @@
           </p:nvSpPr>
           <p:spPr>
             <a:xfrm>
-              <a:off x="4583607" y="4568157"/>
+              <a:off x="4170412" y="4372075"/>
               <a:ext cx="511698" cy="191932"/>
             </a:xfrm>
             <a:custGeom>
@@ -56497,7 +56497,7 @@
               <a:pathLst>
                 <a:path w="511698" h="191932">
                   <a:moveTo>
-                    <a:pt x="27431" y="191932"/>
+                    <a:pt x="27432" y="191932"/>
                   </a:moveTo>
                   <a:lnTo>
                     <a:pt x="484266" y="191932"/>
@@ -56569,7 +56569,7 @@
                     <a:pt x="484266" y="0"/>
                   </a:lnTo>
                   <a:lnTo>
-                    <a:pt x="27431" y="0"/>
+                    <a:pt x="27432" y="0"/>
                   </a:lnTo>
                   <a:lnTo>
                     <a:pt x="30738" y="200"/>
@@ -56676,7 +56676,7 @@
           </p:nvSpPr>
           <p:spPr>
             <a:xfrm>
-              <a:off x="4629327" y="4613877"/>
+              <a:off x="4216132" y="4417795"/>
               <a:ext cx="420258" cy="100492"/>
             </a:xfrm>
             <a:prstGeom prst="rect">
@@ -56722,7 +56722,7 @@
           </p:nvSpPr>
           <p:spPr>
             <a:xfrm>
-              <a:off x="5362914" y="3109883"/>
+              <a:off x="5234722" y="2706428"/>
               <a:ext cx="550468" cy="191932"/>
             </a:xfrm>
             <a:custGeom>
@@ -56730,7 +56730,7 @@
               <a:pathLst>
                 <a:path w="550468" h="191932">
                   <a:moveTo>
-                    <a:pt x="27432" y="191932"/>
+                    <a:pt x="27431" y="191932"/>
                   </a:moveTo>
                   <a:lnTo>
                     <a:pt x="523036" y="191932"/>
@@ -56802,7 +56802,7 @@
                     <a:pt x="523036" y="0"/>
                   </a:lnTo>
                   <a:lnTo>
-                    <a:pt x="27432" y="0"/>
+                    <a:pt x="27431" y="0"/>
                   </a:lnTo>
                   <a:lnTo>
                     <a:pt x="30738" y="200"/>
@@ -56817,7 +56817,7 @@
                     <a:pt x="17704" y="1782"/>
                   </a:lnTo>
                   <a:lnTo>
-                    <a:pt x="13716" y="3675"/>
+                    <a:pt x="13715" y="3675"/>
                   </a:lnTo>
                   <a:lnTo>
                     <a:pt x="10082" y="6183"/>
@@ -56865,7 +56865,7 @@
                     <a:pt x="10082" y="185749"/>
                   </a:lnTo>
                   <a:lnTo>
-                    <a:pt x="13716" y="188257"/>
+                    <a:pt x="13715" y="188257"/>
                   </a:lnTo>
                   <a:lnTo>
                     <a:pt x="17704" y="190149"/>
@@ -56909,7 +56909,7 @@
           </p:nvSpPr>
           <p:spPr>
             <a:xfrm>
-              <a:off x="5408634" y="3155603"/>
+              <a:off x="5280442" y="2752148"/>
               <a:ext cx="459028" cy="100492"/>
             </a:xfrm>
             <a:prstGeom prst="rect">
@@ -56955,7 +56955,7 @@
           </p:nvSpPr>
           <p:spPr>
             <a:xfrm>
-              <a:off x="5891481" y="2669713"/>
+              <a:off x="5578899" y="2423089"/>
               <a:ext cx="558332" cy="191932"/>
             </a:xfrm>
             <a:custGeom>
@@ -56963,7 +56963,7 @@
               <a:pathLst>
                 <a:path w="558332" h="191932">
                   <a:moveTo>
-                    <a:pt x="27431" y="191932"/>
+                    <a:pt x="27432" y="191932"/>
                   </a:moveTo>
                   <a:lnTo>
                     <a:pt x="530900" y="191932"/>
@@ -57002,7 +57002,7 @@
                     <a:pt x="558332" y="164500"/>
                   </a:lnTo>
                   <a:lnTo>
-                    <a:pt x="558332" y="27432"/>
+                    <a:pt x="558332" y="27431"/>
                   </a:lnTo>
                   <a:lnTo>
                     <a:pt x="557977" y="23031"/>
@@ -57035,7 +57035,7 @@
                     <a:pt x="530900" y="0"/>
                   </a:lnTo>
                   <a:lnTo>
-                    <a:pt x="27431" y="0"/>
+                    <a:pt x="27432" y="0"/>
                   </a:lnTo>
                   <a:lnTo>
                     <a:pt x="30738" y="200"/>
@@ -57050,7 +57050,7 @@
                     <a:pt x="17704" y="1782"/>
                   </a:lnTo>
                   <a:lnTo>
-                    <a:pt x="13715" y="3675"/>
+                    <a:pt x="13716" y="3675"/>
                   </a:lnTo>
                   <a:lnTo>
                     <a:pt x="10082" y="6183"/>
@@ -57071,7 +57071,7 @@
                     <a:pt x="88" y="25224"/>
                   </a:lnTo>
                   <a:lnTo>
-                    <a:pt x="0" y="27432"/>
+                    <a:pt x="0" y="27431"/>
                   </a:lnTo>
                   <a:lnTo>
                     <a:pt x="0" y="164500"/>
@@ -57098,7 +57098,7 @@
                     <a:pt x="10082" y="185749"/>
                   </a:lnTo>
                   <a:lnTo>
-                    <a:pt x="13715" y="188257"/>
+                    <a:pt x="13716" y="188257"/>
                   </a:lnTo>
                   <a:lnTo>
                     <a:pt x="17704" y="190149"/>
@@ -57142,7 +57142,7 @@
           </p:nvSpPr>
           <p:spPr>
             <a:xfrm>
-              <a:off x="5937201" y="2715433"/>
+              <a:off x="5624619" y="2468809"/>
               <a:ext cx="466892" cy="100492"/>
             </a:xfrm>
             <a:prstGeom prst="rect">
@@ -60031,7 +60031,7 @@
           <p:spPr>
             <a:xfrm>
               <a:off x="2572908" y="1669789"/>
-              <a:ext cx="3371209" cy="120152"/>
+              <a:ext cx="3724808" cy="120152"/>
             </a:xfrm>
             <a:prstGeom prst="rect">
               <a:avLst/>
@@ -60063,7 +60063,7 @@
                   <a:latin typeface="Helvetica"/>
                   <a:cs typeface="Helvetica"/>
                 </a:rPr>
-                <a:t>Map of Seascape &amp; Experimental Population </a:t>
+                <a:t>(A) Map of Seascape Populations &amp; Experimental </a:t>
               </a:r>
             </a:p>
           </p:txBody>
@@ -60197,8 +60197,8 @@
           </p:nvSpPr>
           <p:spPr>
             <a:xfrm>
-              <a:off x="2257903" y="1600200"/>
-              <a:ext cx="4628193" cy="4525962"/>
+              <a:off x="1648127" y="1600200"/>
+              <a:ext cx="5847744" cy="4525962"/>
             </a:xfrm>
             <a:prstGeom prst="rect">
               <a:avLst/>
@@ -60232,7 +60232,7 @@
           </p:nvSpPr>
           <p:spPr>
             <a:xfrm>
-              <a:off x="2898941" y="1896563"/>
+              <a:off x="2289166" y="1896563"/>
               <a:ext cx="3917565" cy="3824476"/>
             </a:xfrm>
             <a:prstGeom prst="rect">
@@ -60258,7 +60258,7 @@
           </p:nvSpPr>
           <p:spPr>
             <a:xfrm>
-              <a:off x="5670248" y="2084613"/>
+              <a:off x="5060472" y="2084613"/>
               <a:ext cx="112623" cy="211773"/>
             </a:xfrm>
             <a:custGeom>
@@ -60307,7 +60307,7 @@
           </p:nvSpPr>
           <p:spPr>
             <a:xfrm>
-              <a:off x="4804745" y="3497801"/>
+              <a:off x="4194970" y="3497801"/>
               <a:ext cx="215821" cy="415685"/>
             </a:xfrm>
             <a:custGeom>
@@ -60371,7 +60371,7 @@
           </p:nvSpPr>
           <p:spPr>
             <a:xfrm>
-              <a:off x="3757595" y="5516533"/>
+              <a:off x="3147820" y="5516533"/>
               <a:ext cx="101935" cy="186280"/>
             </a:xfrm>
             <a:custGeom>
@@ -60423,7 +60423,7 @@
           </p:nvSpPr>
           <p:spPr>
             <a:xfrm>
-              <a:off x="3971994" y="5097035"/>
+              <a:off x="3362218" y="5097035"/>
               <a:ext cx="592216" cy="603094"/>
             </a:xfrm>
             <a:custGeom>
@@ -60544,7 +60544,7 @@
           </p:nvSpPr>
           <p:spPr>
             <a:xfrm>
-              <a:off x="3316413" y="1896563"/>
+              <a:off x="2706637" y="1896563"/>
               <a:ext cx="1751847" cy="3798672"/>
             </a:xfrm>
             <a:custGeom>
@@ -61349,7 +61349,7 @@
           </p:nvSpPr>
           <p:spPr>
             <a:xfrm>
-              <a:off x="4692685" y="1896563"/>
+              <a:off x="4082909" y="1896563"/>
               <a:ext cx="1082264" cy="973826"/>
             </a:xfrm>
             <a:custGeom>
@@ -61485,7 +61485,7 @@
           </p:nvSpPr>
           <p:spPr>
             <a:xfrm>
-              <a:off x="5800372" y="1896563"/>
+              <a:off x="5190596" y="1896563"/>
               <a:ext cx="28664" cy="147362"/>
             </a:xfrm>
             <a:custGeom>
@@ -61528,27 +61528,342 @@
         </p:sp>
         <p:sp>
           <p:nvSpPr>
-            <p:cNvPr id="13" name="pg13"/>
-            <p:cNvSpPr/>
-            <p:nvPr/>
-          </p:nvSpPr>
-          <p:spPr>
-            <a:xfrm>
-              <a:off x="3777088" y="3716594"/>
-              <a:ext cx="158117" cy="136934"/>
+            <p:cNvPr id="13" name="rc13"/>
+            <p:cNvSpPr/>
+            <p:nvPr/>
+          </p:nvSpPr>
+          <p:spPr>
+            <a:xfrm>
+              <a:off x="3047669" y="4494480"/>
+              <a:ext cx="128065" cy="128065"/>
+            </a:xfrm>
+            <a:prstGeom prst="rect">
+              <a:avLst/>
+            </a:prstGeom>
+            <a:solidFill>
+              <a:srgbClr val="FFA500">
+                <a:alpha val="100000"/>
+              </a:srgbClr>
+            </a:solidFill>
+            <a:ln w="9000" cap="rnd">
+              <a:solidFill>
+                <a:srgbClr val="000000">
+                  <a:alpha val="100000"/>
+                </a:srgbClr>
+              </a:solidFill>
+              <a:prstDash val="solid"/>
+              <a:round/>
+            </a:ln>
+          </p:spPr>
+          <p:txBody>
+            <a:bodyPr/>
+            <a:lstStyle/>
+            <a:p/>
+          </p:txBody>
+        </p:sp>
+        <p:sp>
+          <p:nvSpPr>
+            <p:cNvPr id="14" name="rc14"/>
+            <p:cNvSpPr/>
+            <p:nvPr/>
+          </p:nvSpPr>
+          <p:spPr>
+            <a:xfrm>
+              <a:off x="3297704" y="3743851"/>
+              <a:ext cx="128065" cy="128065"/>
+            </a:xfrm>
+            <a:prstGeom prst="rect">
+              <a:avLst/>
+            </a:prstGeom>
+            <a:solidFill>
+              <a:srgbClr val="FFA500">
+                <a:alpha val="100000"/>
+              </a:srgbClr>
+            </a:solidFill>
+            <a:ln w="9000" cap="rnd">
+              <a:solidFill>
+                <a:srgbClr val="000000">
+                  <a:alpha val="100000"/>
+                </a:srgbClr>
+              </a:solidFill>
+              <a:prstDash val="solid"/>
+              <a:round/>
+            </a:ln>
+          </p:spPr>
+          <p:txBody>
+            <a:bodyPr/>
+            <a:lstStyle/>
+            <a:p/>
+          </p:txBody>
+        </p:sp>
+        <p:sp>
+          <p:nvSpPr>
+            <p:cNvPr id="15" name="rc15"/>
+            <p:cNvSpPr/>
+            <p:nvPr/>
+          </p:nvSpPr>
+          <p:spPr>
+            <a:xfrm>
+              <a:off x="3268887" y="4459077"/>
+              <a:ext cx="128065" cy="128065"/>
+            </a:xfrm>
+            <a:prstGeom prst="rect">
+              <a:avLst/>
+            </a:prstGeom>
+            <a:solidFill>
+              <a:srgbClr val="FFA500">
+                <a:alpha val="100000"/>
+              </a:srgbClr>
+            </a:solidFill>
+            <a:ln w="9000" cap="rnd">
+              <a:solidFill>
+                <a:srgbClr val="000000">
+                  <a:alpha val="100000"/>
+                </a:srgbClr>
+              </a:solidFill>
+              <a:prstDash val="solid"/>
+              <a:round/>
+            </a:ln>
+          </p:spPr>
+          <p:txBody>
+            <a:bodyPr/>
+            <a:lstStyle/>
+            <a:p/>
+          </p:txBody>
+        </p:sp>
+        <p:sp>
+          <p:nvSpPr>
+            <p:cNvPr id="16" name="pt16"/>
+            <p:cNvSpPr/>
+            <p:nvPr/>
+          </p:nvSpPr>
+          <p:spPr>
+            <a:xfrm>
+              <a:off x="3903202" y="4090487"/>
+              <a:ext cx="144506" cy="144506"/>
+            </a:xfrm>
+            <a:prstGeom prst="ellipse">
+              <a:avLst/>
+            </a:prstGeom>
+            <a:solidFill>
+              <a:srgbClr val="3155A9">
+                <a:alpha val="100000"/>
+              </a:srgbClr>
+            </a:solidFill>
+            <a:ln w="9000" cap="rnd">
+              <a:solidFill>
+                <a:srgbClr val="000000">
+                  <a:alpha val="100000"/>
+                </a:srgbClr>
+              </a:solidFill>
+              <a:prstDash val="solid"/>
+              <a:round/>
+            </a:ln>
+          </p:spPr>
+          <p:txBody>
+            <a:bodyPr/>
+            <a:lstStyle/>
+            <a:p/>
+          </p:txBody>
+        </p:sp>
+        <p:sp>
+          <p:nvSpPr>
+            <p:cNvPr id="17" name="pt17"/>
+            <p:cNvSpPr/>
+            <p:nvPr/>
+          </p:nvSpPr>
+          <p:spPr>
+            <a:xfrm>
+              <a:off x="4480732" y="2668873"/>
+              <a:ext cx="144506" cy="144506"/>
+            </a:xfrm>
+            <a:prstGeom prst="ellipse">
+              <a:avLst/>
+            </a:prstGeom>
+            <a:solidFill>
+              <a:srgbClr val="3155A9">
+                <a:alpha val="100000"/>
+              </a:srgbClr>
+            </a:solidFill>
+            <a:ln w="9000" cap="rnd">
+              <a:solidFill>
+                <a:srgbClr val="000000">
+                  <a:alpha val="100000"/>
+                </a:srgbClr>
+              </a:solidFill>
+              <a:prstDash val="solid"/>
+              <a:round/>
+            </a:ln>
+          </p:spPr>
+          <p:txBody>
+            <a:bodyPr/>
+            <a:lstStyle/>
+            <a:p/>
+          </p:txBody>
+        </p:sp>
+        <p:sp>
+          <p:nvSpPr>
+            <p:cNvPr id="18" name="pt18"/>
+            <p:cNvSpPr/>
+            <p:nvPr/>
+          </p:nvSpPr>
+          <p:spPr>
+            <a:xfrm>
+              <a:off x="4016251" y="2316508"/>
+              <a:ext cx="144506" cy="144506"/>
+            </a:xfrm>
+            <a:prstGeom prst="ellipse">
+              <a:avLst/>
+            </a:prstGeom>
+            <a:solidFill>
+              <a:srgbClr val="3155A9">
+                <a:alpha val="100000"/>
+              </a:srgbClr>
+            </a:solidFill>
+            <a:ln w="9000" cap="rnd">
+              <a:solidFill>
+                <a:srgbClr val="000000">
+                  <a:alpha val="100000"/>
+                </a:srgbClr>
+              </a:solidFill>
+              <a:prstDash val="solid"/>
+              <a:round/>
+            </a:ln>
+          </p:spPr>
+          <p:txBody>
+            <a:bodyPr/>
+            <a:lstStyle/>
+            <a:p/>
+          </p:txBody>
+        </p:sp>
+        <p:sp>
+          <p:nvSpPr>
+            <p:cNvPr id="19" name="pt19"/>
+            <p:cNvSpPr/>
+            <p:nvPr/>
+          </p:nvSpPr>
+          <p:spPr>
+            <a:xfrm>
+              <a:off x="3211894" y="4629870"/>
+              <a:ext cx="144506" cy="144506"/>
+            </a:xfrm>
+            <a:prstGeom prst="ellipse">
+              <a:avLst/>
+            </a:prstGeom>
+            <a:solidFill>
+              <a:srgbClr val="3155A9">
+                <a:alpha val="100000"/>
+              </a:srgbClr>
+            </a:solidFill>
+            <a:ln w="9000" cap="rnd">
+              <a:solidFill>
+                <a:srgbClr val="000000">
+                  <a:alpha val="100000"/>
+                </a:srgbClr>
+              </a:solidFill>
+              <a:prstDash val="solid"/>
+              <a:round/>
+            </a:ln>
+          </p:spPr>
+          <p:txBody>
+            <a:bodyPr/>
+            <a:lstStyle/>
+            <a:p/>
+          </p:txBody>
+        </p:sp>
+        <p:sp>
+          <p:nvSpPr>
+            <p:cNvPr id="20" name="pt20"/>
+            <p:cNvSpPr/>
+            <p:nvPr/>
+          </p:nvSpPr>
+          <p:spPr>
+            <a:xfrm>
+              <a:off x="3155937" y="4546872"/>
+              <a:ext cx="144506" cy="144506"/>
+            </a:xfrm>
+            <a:prstGeom prst="ellipse">
+              <a:avLst/>
+            </a:prstGeom>
+            <a:solidFill>
+              <a:srgbClr val="3155A9">
+                <a:alpha val="100000"/>
+              </a:srgbClr>
+            </a:solidFill>
+            <a:ln w="9000" cap="rnd">
+              <a:solidFill>
+                <a:srgbClr val="000000">
+                  <a:alpha val="100000"/>
+                </a:srgbClr>
+              </a:solidFill>
+              <a:prstDash val="solid"/>
+              <a:round/>
+            </a:ln>
+          </p:spPr>
+          <p:txBody>
+            <a:bodyPr/>
+            <a:lstStyle/>
+            <a:p/>
+          </p:txBody>
+        </p:sp>
+        <p:sp>
+          <p:nvSpPr>
+            <p:cNvPr id="21" name="pt21"/>
+            <p:cNvSpPr/>
+            <p:nvPr/>
+          </p:nvSpPr>
+          <p:spPr>
+            <a:xfrm>
+              <a:off x="2893558" y="3387627"/>
+              <a:ext cx="144506" cy="144506"/>
+            </a:xfrm>
+            <a:prstGeom prst="ellipse">
+              <a:avLst/>
+            </a:prstGeom>
+            <a:solidFill>
+              <a:srgbClr val="3155A9">
+                <a:alpha val="100000"/>
+              </a:srgbClr>
+            </a:solidFill>
+            <a:ln w="9000" cap="rnd">
+              <a:solidFill>
+                <a:srgbClr val="000000">
+                  <a:alpha val="100000"/>
+                </a:srgbClr>
+              </a:solidFill>
+              <a:prstDash val="solid"/>
+              <a:round/>
+            </a:ln>
+          </p:spPr>
+          <p:txBody>
+            <a:bodyPr/>
+            <a:lstStyle/>
+            <a:p/>
+          </p:txBody>
+        </p:sp>
+        <p:sp>
+          <p:nvSpPr>
+            <p:cNvPr id="22" name="pg22"/>
+            <p:cNvSpPr/>
+            <p:nvPr/>
+          </p:nvSpPr>
+          <p:spPr>
+            <a:xfrm>
+              <a:off x="3149063" y="3695522"/>
+              <a:ext cx="194617" cy="168543"/>
             </a:xfrm>
             <a:custGeom>
               <a:avLst/>
               <a:pathLst>
-                <a:path w="158117" h="136934">
+                <a:path w="194617" h="168543">
                   <a:moveTo>
-                    <a:pt x="79058" y="0"/>
+                    <a:pt x="97308" y="0"/>
                   </a:moveTo>
                   <a:lnTo>
-                    <a:pt x="158117" y="136934"/>
-                  </a:lnTo>
-                  <a:lnTo>
-                    <a:pt x="0" y="136934"/>
+                    <a:pt x="194617" y="168543"/>
+                  </a:lnTo>
+                  <a:lnTo>
+                    <a:pt x="0" y="168543"/>
                   </a:lnTo>
                   <a:close/>
                 </a:path>
@@ -61577,27 +61892,27 @@
         </p:sp>
         <p:sp>
           <p:nvSpPr>
-            <p:cNvPr id="14" name="pg14"/>
-            <p:cNvSpPr/>
-            <p:nvPr/>
-          </p:nvSpPr>
-          <p:spPr>
-            <a:xfrm>
-              <a:off x="3748271" y="4431820"/>
-              <a:ext cx="158117" cy="136934"/>
+            <p:cNvPr id="23" name="pg23"/>
+            <p:cNvSpPr/>
+            <p:nvPr/>
+          </p:nvSpPr>
+          <p:spPr>
+            <a:xfrm>
+              <a:off x="3120245" y="4410747"/>
+              <a:ext cx="194617" cy="168543"/>
             </a:xfrm>
             <a:custGeom>
               <a:avLst/>
               <a:pathLst>
-                <a:path w="158117" h="136934">
+                <a:path w="194617" h="168543">
                   <a:moveTo>
-                    <a:pt x="79058" y="0"/>
+                    <a:pt x="97308" y="0"/>
                   </a:moveTo>
                   <a:lnTo>
-                    <a:pt x="158117" y="136934"/>
-                  </a:lnTo>
-                  <a:lnTo>
-                    <a:pt x="0" y="136934"/>
+                    <a:pt x="194617" y="168543"/>
+                  </a:lnTo>
+                  <a:lnTo>
+                    <a:pt x="0" y="168543"/>
                   </a:lnTo>
                   <a:close/>
                 </a:path>
@@ -61626,339 +61941,24 @@
         </p:sp>
         <p:sp>
           <p:nvSpPr>
-            <p:cNvPr id="15" name="rc15"/>
-            <p:cNvSpPr/>
-            <p:nvPr/>
-          </p:nvSpPr>
-          <p:spPr>
-            <a:xfrm>
-              <a:off x="3681463" y="4518498"/>
-              <a:ext cx="80029" cy="80029"/>
-            </a:xfrm>
-            <a:prstGeom prst="rect">
-              <a:avLst/>
-            </a:prstGeom>
-            <a:solidFill>
-              <a:srgbClr val="FFA500">
-                <a:alpha val="100000"/>
-              </a:srgbClr>
-            </a:solidFill>
-            <a:ln w="9000" cap="rnd">
-              <a:solidFill>
-                <a:srgbClr val="000000">
-                  <a:alpha val="100000"/>
-                </a:srgbClr>
-              </a:solidFill>
-              <a:prstDash val="solid"/>
-              <a:round/>
-            </a:ln>
-          </p:spPr>
-          <p:txBody>
-            <a:bodyPr/>
-            <a:lstStyle/>
-            <a:p/>
-          </p:txBody>
-        </p:sp>
-        <p:sp>
-          <p:nvSpPr>
-            <p:cNvPr id="16" name="rc16"/>
-            <p:cNvSpPr/>
-            <p:nvPr/>
-          </p:nvSpPr>
-          <p:spPr>
-            <a:xfrm>
-              <a:off x="3931498" y="3767869"/>
-              <a:ext cx="80029" cy="80029"/>
-            </a:xfrm>
-            <a:prstGeom prst="rect">
-              <a:avLst/>
-            </a:prstGeom>
-            <a:solidFill>
-              <a:srgbClr val="FFA500">
-                <a:alpha val="100000"/>
-              </a:srgbClr>
-            </a:solidFill>
-            <a:ln w="9000" cap="rnd">
-              <a:solidFill>
-                <a:srgbClr val="000000">
-                  <a:alpha val="100000"/>
-                </a:srgbClr>
-              </a:solidFill>
-              <a:prstDash val="solid"/>
-              <a:round/>
-            </a:ln>
-          </p:spPr>
-          <p:txBody>
-            <a:bodyPr/>
-            <a:lstStyle/>
-            <a:p/>
-          </p:txBody>
-        </p:sp>
-        <p:sp>
-          <p:nvSpPr>
-            <p:cNvPr id="17" name="rc17"/>
-            <p:cNvSpPr/>
-            <p:nvPr/>
-          </p:nvSpPr>
-          <p:spPr>
-            <a:xfrm>
-              <a:off x="3902680" y="4483095"/>
-              <a:ext cx="80029" cy="80029"/>
-            </a:xfrm>
-            <a:prstGeom prst="rect">
-              <a:avLst/>
-            </a:prstGeom>
-            <a:solidFill>
-              <a:srgbClr val="FFA500">
-                <a:alpha val="100000"/>
-              </a:srgbClr>
-            </a:solidFill>
-            <a:ln w="9000" cap="rnd">
-              <a:solidFill>
-                <a:srgbClr val="000000">
-                  <a:alpha val="100000"/>
-                </a:srgbClr>
-              </a:solidFill>
-              <a:prstDash val="solid"/>
-              <a:round/>
-            </a:ln>
-          </p:spPr>
-          <p:txBody>
-            <a:bodyPr/>
-            <a:lstStyle/>
-            <a:p/>
-          </p:txBody>
-        </p:sp>
-        <p:sp>
-          <p:nvSpPr>
-            <p:cNvPr id="18" name="pt18"/>
-            <p:cNvSpPr/>
-            <p:nvPr/>
-          </p:nvSpPr>
-          <p:spPr>
-            <a:xfrm>
-              <a:off x="4540078" y="4117588"/>
-              <a:ext cx="90303" cy="90303"/>
-            </a:xfrm>
-            <a:prstGeom prst="ellipse">
-              <a:avLst/>
-            </a:prstGeom>
-            <a:solidFill>
-              <a:srgbClr val="3155A9">
-                <a:alpha val="100000"/>
-              </a:srgbClr>
-            </a:solidFill>
-            <a:ln w="9000" cap="rnd">
-              <a:solidFill>
-                <a:srgbClr val="000000">
-                  <a:alpha val="100000"/>
-                </a:srgbClr>
-              </a:solidFill>
-              <a:prstDash val="solid"/>
-              <a:round/>
-            </a:ln>
-          </p:spPr>
-          <p:txBody>
-            <a:bodyPr/>
-            <a:lstStyle/>
-            <a:p/>
-          </p:txBody>
-        </p:sp>
-        <p:sp>
-          <p:nvSpPr>
-            <p:cNvPr id="19" name="pt19"/>
-            <p:cNvSpPr/>
-            <p:nvPr/>
-          </p:nvSpPr>
-          <p:spPr>
-            <a:xfrm>
-              <a:off x="5117609" y="2695974"/>
-              <a:ext cx="90303" cy="90303"/>
-            </a:xfrm>
-            <a:prstGeom prst="ellipse">
-              <a:avLst/>
-            </a:prstGeom>
-            <a:solidFill>
-              <a:srgbClr val="3155A9">
-                <a:alpha val="100000"/>
-              </a:srgbClr>
-            </a:solidFill>
-            <a:ln w="9000" cap="rnd">
-              <a:solidFill>
-                <a:srgbClr val="000000">
-                  <a:alpha val="100000"/>
-                </a:srgbClr>
-              </a:solidFill>
-              <a:prstDash val="solid"/>
-              <a:round/>
-            </a:ln>
-          </p:spPr>
-          <p:txBody>
-            <a:bodyPr/>
-            <a:lstStyle/>
-            <a:p/>
-          </p:txBody>
-        </p:sp>
-        <p:sp>
-          <p:nvSpPr>
-            <p:cNvPr id="20" name="pt20"/>
-            <p:cNvSpPr/>
-            <p:nvPr/>
-          </p:nvSpPr>
-          <p:spPr>
-            <a:xfrm>
-              <a:off x="4653128" y="2343609"/>
-              <a:ext cx="90303" cy="90303"/>
-            </a:xfrm>
-            <a:prstGeom prst="ellipse">
-              <a:avLst/>
-            </a:prstGeom>
-            <a:solidFill>
-              <a:srgbClr val="3155A9">
-                <a:alpha val="100000"/>
-              </a:srgbClr>
-            </a:solidFill>
-            <a:ln w="9000" cap="rnd">
-              <a:solidFill>
-                <a:srgbClr val="000000">
-                  <a:alpha val="100000"/>
-                </a:srgbClr>
-              </a:solidFill>
-              <a:prstDash val="solid"/>
-              <a:round/>
-            </a:ln>
-          </p:spPr>
-          <p:txBody>
-            <a:bodyPr/>
-            <a:lstStyle/>
-            <a:p/>
-          </p:txBody>
-        </p:sp>
-        <p:sp>
-          <p:nvSpPr>
-            <p:cNvPr id="21" name="pt21"/>
-            <p:cNvSpPr/>
-            <p:nvPr/>
-          </p:nvSpPr>
-          <p:spPr>
-            <a:xfrm>
-              <a:off x="3848771" y="4656972"/>
-              <a:ext cx="90303" cy="90303"/>
-            </a:xfrm>
-            <a:prstGeom prst="ellipse">
-              <a:avLst/>
-            </a:prstGeom>
-            <a:solidFill>
-              <a:srgbClr val="3155A9">
-                <a:alpha val="100000"/>
-              </a:srgbClr>
-            </a:solidFill>
-            <a:ln w="9000" cap="rnd">
-              <a:solidFill>
-                <a:srgbClr val="000000">
-                  <a:alpha val="100000"/>
-                </a:srgbClr>
-              </a:solidFill>
-              <a:prstDash val="solid"/>
-              <a:round/>
-            </a:ln>
-          </p:spPr>
-          <p:txBody>
-            <a:bodyPr/>
-            <a:lstStyle/>
-            <a:p/>
-          </p:txBody>
-        </p:sp>
-        <p:sp>
-          <p:nvSpPr>
-            <p:cNvPr id="22" name="pt22"/>
-            <p:cNvSpPr/>
-            <p:nvPr/>
-          </p:nvSpPr>
-          <p:spPr>
-            <a:xfrm>
-              <a:off x="3792814" y="4573973"/>
-              <a:ext cx="90303" cy="90303"/>
-            </a:xfrm>
-            <a:prstGeom prst="ellipse">
-              <a:avLst/>
-            </a:prstGeom>
-            <a:solidFill>
-              <a:srgbClr val="3155A9">
-                <a:alpha val="100000"/>
-              </a:srgbClr>
-            </a:solidFill>
-            <a:ln w="9000" cap="rnd">
-              <a:solidFill>
-                <a:srgbClr val="000000">
-                  <a:alpha val="100000"/>
-                </a:srgbClr>
-              </a:solidFill>
-              <a:prstDash val="solid"/>
-              <a:round/>
-            </a:ln>
-          </p:spPr>
-          <p:txBody>
-            <a:bodyPr/>
-            <a:lstStyle/>
-            <a:p/>
-          </p:txBody>
-        </p:sp>
-        <p:sp>
-          <p:nvSpPr>
-            <p:cNvPr id="23" name="pt23"/>
-            <p:cNvSpPr/>
-            <p:nvPr/>
-          </p:nvSpPr>
-          <p:spPr>
-            <a:xfrm>
-              <a:off x="3530435" y="3414728"/>
-              <a:ext cx="90303" cy="90303"/>
-            </a:xfrm>
-            <a:prstGeom prst="ellipse">
-              <a:avLst/>
-            </a:prstGeom>
-            <a:solidFill>
-              <a:srgbClr val="3155A9">
-                <a:alpha val="100000"/>
-              </a:srgbClr>
-            </a:solidFill>
-            <a:ln w="9000" cap="rnd">
-              <a:solidFill>
-                <a:srgbClr val="000000">
-                  <a:alpha val="100000"/>
-                </a:srgbClr>
-              </a:solidFill>
-              <a:prstDash val="solid"/>
-              <a:round/>
-            </a:ln>
-          </p:spPr>
-          <p:txBody>
-            <a:bodyPr/>
-            <a:lstStyle/>
-            <a:p/>
-          </p:txBody>
-        </p:sp>
-        <p:sp>
-          <p:nvSpPr>
             <p:cNvPr id="24" name="pl24"/>
             <p:cNvSpPr/>
             <p:nvPr/>
           </p:nvSpPr>
           <p:spPr>
             <a:xfrm>
-              <a:off x="3985244" y="3517473"/>
-              <a:ext cx="959892" cy="286314"/>
+              <a:off x="3376095" y="3807884"/>
+              <a:ext cx="420893" cy="2"/>
             </a:xfrm>
             <a:custGeom>
               <a:avLst/>
               <a:pathLst>
-                <a:path w="959892" h="286314">
+                <a:path w="420893" h="2">
                   <a:moveTo>
-                    <a:pt x="959892" y="0"/>
+                    <a:pt x="420893" y="2"/>
                   </a:moveTo>
                   <a:lnTo>
-                    <a:pt x="0" y="286314"/>
+                    <a:pt x="0" y="0"/>
                   </a:lnTo>
                 </a:path>
               </a:pathLst>
@@ -61987,18 +61987,18 @@
           </p:nvSpPr>
           <p:spPr>
             <a:xfrm>
-              <a:off x="3956412" y="4232746"/>
-              <a:ext cx="948297" cy="286222"/>
+              <a:off x="3347277" y="4523109"/>
+              <a:ext cx="409282" cy="1"/>
             </a:xfrm>
             <a:custGeom>
               <a:avLst/>
               <a:pathLst>
-                <a:path w="948297" h="286222">
+                <a:path w="409282" h="1">
                   <a:moveTo>
-                    <a:pt x="948297" y="0"/>
+                    <a:pt x="409282" y="1"/>
                   </a:moveTo>
                   <a:lnTo>
-                    <a:pt x="0" y="286222"/>
+                    <a:pt x="0" y="0"/>
                   </a:lnTo>
                 </a:path>
               </a:pathLst>
@@ -62027,7 +62027,7 @@
           </p:nvSpPr>
           <p:spPr>
             <a:xfrm>
-              <a:off x="4945136" y="3419201"/>
+              <a:off x="3796988" y="3711920"/>
               <a:ext cx="667694" cy="191932"/>
             </a:xfrm>
             <a:custGeom>
@@ -62035,7 +62035,7 @@
               <a:pathLst>
                 <a:path w="667694" h="191932">
                   <a:moveTo>
-                    <a:pt x="27432" y="191932"/>
+                    <a:pt x="27431" y="191932"/>
                   </a:moveTo>
                   <a:lnTo>
                     <a:pt x="640262" y="191932"/>
@@ -62107,7 +62107,7 @@
                     <a:pt x="640262" y="0"/>
                   </a:lnTo>
                   <a:lnTo>
-                    <a:pt x="27432" y="0"/>
+                    <a:pt x="27431" y="0"/>
                   </a:lnTo>
                   <a:lnTo>
                     <a:pt x="30738" y="200"/>
@@ -62122,7 +62122,7 @@
                     <a:pt x="17704" y="1782"/>
                   </a:lnTo>
                   <a:lnTo>
-                    <a:pt x="13715" y="3675"/>
+                    <a:pt x="13716" y="3675"/>
                   </a:lnTo>
                   <a:lnTo>
                     <a:pt x="10082" y="6183"/>
@@ -62170,7 +62170,7 @@
                     <a:pt x="10082" y="185749"/>
                   </a:lnTo>
                   <a:lnTo>
-                    <a:pt x="13715" y="188257"/>
+                    <a:pt x="13716" y="188257"/>
                   </a:lnTo>
                   <a:lnTo>
                     <a:pt x="17704" y="190149"/>
@@ -62214,7 +62214,7 @@
           </p:nvSpPr>
           <p:spPr>
             <a:xfrm>
-              <a:off x="4990856" y="3464921"/>
+              <a:off x="3842708" y="3757640"/>
               <a:ext cx="576254" cy="100492"/>
             </a:xfrm>
             <a:prstGeom prst="rect">
@@ -62260,7 +62260,7 @@
           </p:nvSpPr>
           <p:spPr>
             <a:xfrm>
-              <a:off x="4904710" y="4134422"/>
+              <a:off x="3756560" y="4427144"/>
               <a:ext cx="690920" cy="191932"/>
             </a:xfrm>
             <a:custGeom>
@@ -62307,7 +62307,7 @@
                     <a:pt x="690920" y="164500"/>
                   </a:lnTo>
                   <a:lnTo>
-                    <a:pt x="690920" y="27431"/>
+                    <a:pt x="690920" y="27432"/>
                   </a:lnTo>
                   <a:lnTo>
                     <a:pt x="690565" y="23031"/>
@@ -62355,7 +62355,7 @@
                     <a:pt x="17704" y="1782"/>
                   </a:lnTo>
                   <a:lnTo>
-                    <a:pt x="13715" y="3675"/>
+                    <a:pt x="13716" y="3675"/>
                   </a:lnTo>
                   <a:lnTo>
                     <a:pt x="10082" y="6183"/>
@@ -62376,7 +62376,7 @@
                     <a:pt x="88" y="25224"/>
                   </a:lnTo>
                   <a:lnTo>
-                    <a:pt x="0" y="27431"/>
+                    <a:pt x="0" y="27432"/>
                   </a:lnTo>
                   <a:lnTo>
                     <a:pt x="0" y="164500"/>
@@ -62403,7 +62403,7 @@
                     <a:pt x="10082" y="185749"/>
                   </a:lnTo>
                   <a:lnTo>
-                    <a:pt x="13715" y="188257"/>
+                    <a:pt x="13716" y="188257"/>
                   </a:lnTo>
                   <a:lnTo>
                     <a:pt x="17704" y="190149"/>
@@ -62447,7 +62447,7 @@
           </p:nvSpPr>
           <p:spPr>
             <a:xfrm>
-              <a:off x="4950430" y="4180142"/>
+              <a:off x="3802280" y="4472864"/>
               <a:ext cx="599480" cy="100492"/>
             </a:xfrm>
             <a:prstGeom prst="rect">
@@ -62493,18 +62493,18 @@
           </p:nvSpPr>
           <p:spPr>
             <a:xfrm>
-              <a:off x="3813216" y="3545846"/>
-              <a:ext cx="40663" cy="248197"/>
+              <a:off x="3049624" y="3651543"/>
+              <a:ext cx="185611" cy="147492"/>
             </a:xfrm>
             <a:custGeom>
               <a:avLst/>
               <a:pathLst>
-                <a:path w="40663" h="248197">
+                <a:path w="185611" h="147492">
                   <a:moveTo>
                     <a:pt x="0" y="0"/>
                   </a:moveTo>
                   <a:lnTo>
-                    <a:pt x="40663" y="248197"/>
+                    <a:pt x="185611" y="147492"/>
                   </a:lnTo>
                 </a:path>
               </a:pathLst>
@@ -62533,18 +62533,18 @@
           </p:nvSpPr>
           <p:spPr>
             <a:xfrm>
-              <a:off x="3815396" y="4261791"/>
-              <a:ext cx="11293" cy="247315"/>
+              <a:off x="3080122" y="4375697"/>
+              <a:ext cx="127767" cy="137046"/>
             </a:xfrm>
             <a:custGeom>
               <a:avLst/>
               <a:pathLst>
-                <a:path w="11293" h="247315">
+                <a:path w="127767" h="137046">
                   <a:moveTo>
                     <a:pt x="0" y="0"/>
                   </a:moveTo>
                   <a:lnTo>
-                    <a:pt x="11293" y="247315"/>
+                    <a:pt x="127767" y="137046"/>
                   </a:lnTo>
                 </a:path>
               </a:pathLst>
@@ -62573,7 +62573,7 @@
           </p:nvSpPr>
           <p:spPr>
             <a:xfrm>
-              <a:off x="3129976" y="3419199"/>
+              <a:off x="2366385" y="3536282"/>
               <a:ext cx="683239" cy="191932"/>
             </a:xfrm>
             <a:custGeom>
@@ -62620,7 +62620,7 @@
                     <a:pt x="683239" y="164500"/>
                   </a:lnTo>
                   <a:lnTo>
-                    <a:pt x="683239" y="27431"/>
+                    <a:pt x="683239" y="27432"/>
                   </a:lnTo>
                   <a:lnTo>
                     <a:pt x="682884" y="23031"/>
@@ -62668,7 +62668,7 @@
                     <a:pt x="17704" y="1782"/>
                   </a:lnTo>
                   <a:lnTo>
-                    <a:pt x="13715" y="3675"/>
+                    <a:pt x="13716" y="3675"/>
                   </a:lnTo>
                   <a:lnTo>
                     <a:pt x="10082" y="6183"/>
@@ -62689,7 +62689,7 @@
                     <a:pt x="88" y="25224"/>
                   </a:lnTo>
                   <a:lnTo>
-                    <a:pt x="0" y="27431"/>
+                    <a:pt x="0" y="27432"/>
                   </a:lnTo>
                   <a:lnTo>
                     <a:pt x="0" y="164500"/>
@@ -62716,7 +62716,7 @@
                     <a:pt x="10082" y="185749"/>
                   </a:lnTo>
                   <a:lnTo>
-                    <a:pt x="13715" y="188257"/>
+                    <a:pt x="13716" y="188257"/>
                   </a:lnTo>
                   <a:lnTo>
                     <a:pt x="17704" y="190149"/>
@@ -62760,7 +62760,7 @@
           </p:nvSpPr>
           <p:spPr>
             <a:xfrm>
-              <a:off x="3175696" y="3464919"/>
+              <a:off x="2412105" y="3582002"/>
               <a:ext cx="591799" cy="100492"/>
             </a:xfrm>
             <a:prstGeom prst="rect">
@@ -62806,13 +62806,13 @@
           </p:nvSpPr>
           <p:spPr>
             <a:xfrm>
-              <a:off x="3070160" y="4134424"/>
-              <a:ext cx="745235" cy="191932"/>
+              <a:off x="2334886" y="4251517"/>
+              <a:ext cx="745236" cy="191932"/>
             </a:xfrm>
             <a:custGeom>
               <a:avLst/>
               <a:pathLst>
-                <a:path w="745235" h="191932">
+                <a:path w="745236" h="191932">
                   <a:moveTo>
                     <a:pt x="27431" y="191932"/>
                   </a:moveTo>
@@ -62850,10 +62850,10 @@
                     <a:pt x="744880" y="168900"/>
                   </a:lnTo>
                   <a:lnTo>
-                    <a:pt x="745235" y="164500"/>
-                  </a:lnTo>
-                  <a:lnTo>
-                    <a:pt x="745235" y="27432"/>
+                    <a:pt x="745236" y="164500"/>
+                  </a:lnTo>
+                  <a:lnTo>
+                    <a:pt x="745236" y="27432"/>
                   </a:lnTo>
                   <a:lnTo>
                     <a:pt x="744880" y="23031"/>
@@ -62993,7 +62993,7 @@
           </p:nvSpPr>
           <p:spPr>
             <a:xfrm>
-              <a:off x="3115880" y="4180144"/>
+              <a:off x="2380606" y="4297237"/>
               <a:ext cx="653796" cy="100492"/>
             </a:xfrm>
             <a:prstGeom prst="rect">
@@ -63039,15 +63039,15 @@
           </p:nvSpPr>
           <p:spPr>
             <a:xfrm>
-              <a:off x="3723891" y="4572330"/>
-              <a:ext cx="114586" cy="656103"/>
+              <a:off x="3114115" y="4572330"/>
+              <a:ext cx="114587" cy="656102"/>
             </a:xfrm>
             <a:custGeom>
               <a:avLst/>
               <a:pathLst>
-                <a:path w="114586" h="656103">
+                <a:path w="114587" h="656102">
                   <a:moveTo>
-                    <a:pt x="114586" y="656103"/>
+                    <a:pt x="114587" y="656102"/>
                   </a:moveTo>
                   <a:lnTo>
                     <a:pt x="0" y="0"/>
@@ -63079,7 +63079,7 @@
           </p:nvSpPr>
           <p:spPr>
             <a:xfrm>
-              <a:off x="3838477" y="5145555"/>
+              <a:off x="3228702" y="5145554"/>
               <a:ext cx="535106" cy="191932"/>
             </a:xfrm>
             <a:custGeom>
@@ -63087,7 +63087,7 @@
               <a:pathLst>
                 <a:path w="535106" h="191932">
                   <a:moveTo>
-                    <a:pt x="27432" y="191932"/>
+                    <a:pt x="27431" y="191932"/>
                   </a:moveTo>
                   <a:lnTo>
                     <a:pt x="507674" y="191932"/>
@@ -63126,7 +63126,7 @@
                     <a:pt x="535106" y="164500"/>
                   </a:lnTo>
                   <a:lnTo>
-                    <a:pt x="535106" y="27432"/>
+                    <a:pt x="535106" y="27431"/>
                   </a:lnTo>
                   <a:lnTo>
                     <a:pt x="534751" y="23031"/>
@@ -63159,7 +63159,7 @@
                     <a:pt x="507674" y="0"/>
                   </a:lnTo>
                   <a:lnTo>
-                    <a:pt x="27432" y="0"/>
+                    <a:pt x="27431" y="0"/>
                   </a:lnTo>
                   <a:lnTo>
                     <a:pt x="30738" y="200"/>
@@ -63195,7 +63195,7 @@
                     <a:pt x="88" y="25224"/>
                   </a:lnTo>
                   <a:lnTo>
-                    <a:pt x="0" y="27432"/>
+                    <a:pt x="0" y="27431"/>
                   </a:lnTo>
                   <a:lnTo>
                     <a:pt x="0" y="164500"/>
@@ -63266,7 +63266,7 @@
           </p:nvSpPr>
           <p:spPr>
             <a:xfrm>
-              <a:off x="3884197" y="5191275"/>
+              <a:off x="3274422" y="5191274"/>
               <a:ext cx="443666" cy="100492"/>
             </a:xfrm>
             <a:prstGeom prst="rect">
@@ -63312,7 +63312,7 @@
           </p:nvSpPr>
           <p:spPr>
             <a:xfrm>
-              <a:off x="2898941" y="1896563"/>
+              <a:off x="2289166" y="1896563"/>
               <a:ext cx="0" cy="3824476"/>
             </a:xfrm>
             <a:custGeom>
@@ -63352,7 +63352,7 @@
           </p:nvSpPr>
           <p:spPr>
             <a:xfrm>
-              <a:off x="2493411" y="5211154"/>
+              <a:off x="1883636" y="5211154"/>
               <a:ext cx="217535" cy="80101"/>
             </a:xfrm>
             <a:prstGeom prst="rect">
@@ -63398,7 +63398,7 @@
           </p:nvSpPr>
           <p:spPr>
             <a:xfrm>
-              <a:off x="2710947" y="5192775"/>
+              <a:off x="2101171" y="5192775"/>
               <a:ext cx="44714" cy="98480"/>
             </a:xfrm>
             <a:prstGeom prst="rect">
@@ -63444,7 +63444,7 @@
           </p:nvSpPr>
           <p:spPr>
             <a:xfrm>
-              <a:off x="2755661" y="5211154"/>
+              <a:off x="2145886" y="5211154"/>
               <a:ext cx="80650" cy="80101"/>
             </a:xfrm>
             <a:prstGeom prst="rect">
@@ -63490,7 +63490,7 @@
           </p:nvSpPr>
           <p:spPr>
             <a:xfrm>
-              <a:off x="2493411" y="4723289"/>
+              <a:off x="1883636" y="4723289"/>
               <a:ext cx="217535" cy="80101"/>
             </a:xfrm>
             <a:prstGeom prst="rect">
@@ -63536,7 +63536,7 @@
           </p:nvSpPr>
           <p:spPr>
             <a:xfrm>
-              <a:off x="2710947" y="4704910"/>
+              <a:off x="2101171" y="4704910"/>
               <a:ext cx="44714" cy="98480"/>
             </a:xfrm>
             <a:prstGeom prst="rect">
@@ -63582,7 +63582,7 @@
           </p:nvSpPr>
           <p:spPr>
             <a:xfrm>
-              <a:off x="2755661" y="4723289"/>
+              <a:off x="2145886" y="4723289"/>
               <a:ext cx="80650" cy="80101"/>
             </a:xfrm>
             <a:prstGeom prst="rect">
@@ -63628,7 +63628,7 @@
           </p:nvSpPr>
           <p:spPr>
             <a:xfrm>
-              <a:off x="2493411" y="4235425"/>
+              <a:off x="1883636" y="4235425"/>
               <a:ext cx="217535" cy="80101"/>
             </a:xfrm>
             <a:prstGeom prst="rect">
@@ -63674,7 +63674,7 @@
           </p:nvSpPr>
           <p:spPr>
             <a:xfrm>
-              <a:off x="2710947" y="4217045"/>
+              <a:off x="2101171" y="4217045"/>
               <a:ext cx="44714" cy="98480"/>
             </a:xfrm>
             <a:prstGeom prst="rect">
@@ -63720,7 +63720,7 @@
           </p:nvSpPr>
           <p:spPr>
             <a:xfrm>
-              <a:off x="2755661" y="4235425"/>
+              <a:off x="2145886" y="4235425"/>
               <a:ext cx="80650" cy="80101"/>
             </a:xfrm>
             <a:prstGeom prst="rect">
@@ -63766,7 +63766,7 @@
           </p:nvSpPr>
           <p:spPr>
             <a:xfrm>
-              <a:off x="2493411" y="3747514"/>
+              <a:off x="1883636" y="3747514"/>
               <a:ext cx="217535" cy="80101"/>
             </a:xfrm>
             <a:prstGeom prst="rect">
@@ -63812,7 +63812,7 @@
           </p:nvSpPr>
           <p:spPr>
             <a:xfrm>
-              <a:off x="2710947" y="3729134"/>
+              <a:off x="2101171" y="3729134"/>
               <a:ext cx="44714" cy="98480"/>
             </a:xfrm>
             <a:prstGeom prst="rect">
@@ -63858,7 +63858,7 @@
           </p:nvSpPr>
           <p:spPr>
             <a:xfrm>
-              <a:off x="2755661" y="3747514"/>
+              <a:off x="2145886" y="3747514"/>
               <a:ext cx="80650" cy="80101"/>
             </a:xfrm>
             <a:prstGeom prst="rect">
@@ -63904,7 +63904,7 @@
           </p:nvSpPr>
           <p:spPr>
             <a:xfrm>
-              <a:off x="2493411" y="3259649"/>
+              <a:off x="1883636" y="3259649"/>
               <a:ext cx="217535" cy="80101"/>
             </a:xfrm>
             <a:prstGeom prst="rect">
@@ -63950,7 +63950,7 @@
           </p:nvSpPr>
           <p:spPr>
             <a:xfrm>
-              <a:off x="2710947" y="3241270"/>
+              <a:off x="2101171" y="3241270"/>
               <a:ext cx="44714" cy="98480"/>
             </a:xfrm>
             <a:prstGeom prst="rect">
@@ -63996,7 +63996,7 @@
           </p:nvSpPr>
           <p:spPr>
             <a:xfrm>
-              <a:off x="2755661" y="3259649"/>
+              <a:off x="2145886" y="3259649"/>
               <a:ext cx="80650" cy="80101"/>
             </a:xfrm>
             <a:prstGeom prst="rect">
@@ -64042,7 +64042,7 @@
           </p:nvSpPr>
           <p:spPr>
             <a:xfrm>
-              <a:off x="2493411" y="2771830"/>
+              <a:off x="1883636" y="2771830"/>
               <a:ext cx="217535" cy="80101"/>
             </a:xfrm>
             <a:prstGeom prst="rect">
@@ -64088,7 +64088,7 @@
           </p:nvSpPr>
           <p:spPr>
             <a:xfrm>
-              <a:off x="2710947" y="2753450"/>
+              <a:off x="2101171" y="2753450"/>
               <a:ext cx="44714" cy="98480"/>
             </a:xfrm>
             <a:prstGeom prst="rect">
@@ -64134,7 +64134,7 @@
           </p:nvSpPr>
           <p:spPr>
             <a:xfrm>
-              <a:off x="2755661" y="2771830"/>
+              <a:off x="2145886" y="2771830"/>
               <a:ext cx="80650" cy="80101"/>
             </a:xfrm>
             <a:prstGeom prst="rect">
@@ -64180,7 +64180,7 @@
           </p:nvSpPr>
           <p:spPr>
             <a:xfrm>
-              <a:off x="2493411" y="2283965"/>
+              <a:off x="1883636" y="2283965"/>
               <a:ext cx="217535" cy="80101"/>
             </a:xfrm>
             <a:prstGeom prst="rect">
@@ -64226,7 +64226,7 @@
           </p:nvSpPr>
           <p:spPr>
             <a:xfrm>
-              <a:off x="2710947" y="2265586"/>
+              <a:off x="2101171" y="2265586"/>
               <a:ext cx="44714" cy="98480"/>
             </a:xfrm>
             <a:prstGeom prst="rect">
@@ -64272,7 +64272,7 @@
           </p:nvSpPr>
           <p:spPr>
             <a:xfrm>
-              <a:off x="2755661" y="2283965"/>
+              <a:off x="2145886" y="2283965"/>
               <a:ext cx="80650" cy="80101"/>
             </a:xfrm>
             <a:prstGeom prst="rect">
@@ -64318,7 +64318,7 @@
           </p:nvSpPr>
           <p:spPr>
             <a:xfrm>
-              <a:off x="2864147" y="5252257"/>
+              <a:off x="2254371" y="5252257"/>
               <a:ext cx="34794" cy="0"/>
             </a:xfrm>
             <a:custGeom>
@@ -64358,7 +64358,7 @@
           </p:nvSpPr>
           <p:spPr>
             <a:xfrm>
-              <a:off x="2864147" y="4764392"/>
+              <a:off x="2254371" y="4764392"/>
               <a:ext cx="34794" cy="0"/>
             </a:xfrm>
             <a:custGeom>
@@ -64398,7 +64398,7 @@
           </p:nvSpPr>
           <p:spPr>
             <a:xfrm>
-              <a:off x="2864147" y="4276527"/>
+              <a:off x="2254371" y="4276527"/>
               <a:ext cx="34794" cy="0"/>
             </a:xfrm>
             <a:custGeom>
@@ -64438,7 +64438,7 @@
           </p:nvSpPr>
           <p:spPr>
             <a:xfrm>
-              <a:off x="2864147" y="3788662"/>
+              <a:off x="2254371" y="3788662"/>
               <a:ext cx="34794" cy="0"/>
             </a:xfrm>
             <a:custGeom>
@@ -64478,7 +64478,7 @@
           </p:nvSpPr>
           <p:spPr>
             <a:xfrm>
-              <a:off x="2864147" y="3300797"/>
+              <a:off x="2254371" y="3300797"/>
               <a:ext cx="34794" cy="0"/>
             </a:xfrm>
             <a:custGeom>
@@ -64518,7 +64518,7 @@
           </p:nvSpPr>
           <p:spPr>
             <a:xfrm>
-              <a:off x="2864147" y="2812932"/>
+              <a:off x="2254371" y="2812932"/>
               <a:ext cx="34794" cy="0"/>
             </a:xfrm>
             <a:custGeom>
@@ -64558,7 +64558,7 @@
           </p:nvSpPr>
           <p:spPr>
             <a:xfrm>
-              <a:off x="2864147" y="2325067"/>
+              <a:off x="2254371" y="2325067"/>
               <a:ext cx="34794" cy="0"/>
             </a:xfrm>
             <a:custGeom>
@@ -64598,7 +64598,7 @@
           </p:nvSpPr>
           <p:spPr>
             <a:xfrm>
-              <a:off x="2898941" y="5721039"/>
+              <a:off x="2289166" y="5721039"/>
               <a:ext cx="3917565" cy="0"/>
             </a:xfrm>
             <a:custGeom>
@@ -64638,7 +64638,7 @@
           </p:nvSpPr>
           <p:spPr>
             <a:xfrm>
-              <a:off x="3557659" y="5721039"/>
+              <a:off x="2947883" y="5721039"/>
               <a:ext cx="0" cy="34794"/>
             </a:xfrm>
             <a:custGeom>
@@ -64678,7 +64678,7 @@
           </p:nvSpPr>
           <p:spPr>
             <a:xfrm>
-              <a:off x="4326761" y="5721039"/>
+              <a:off x="3716985" y="5721039"/>
               <a:ext cx="0" cy="34794"/>
             </a:xfrm>
             <a:custGeom>
@@ -64718,7 +64718,7 @@
           </p:nvSpPr>
           <p:spPr>
             <a:xfrm>
-              <a:off x="5095862" y="5721039"/>
+              <a:off x="4486087" y="5721039"/>
               <a:ext cx="0" cy="34794"/>
             </a:xfrm>
             <a:custGeom>
@@ -64758,7 +64758,7 @@
           </p:nvSpPr>
           <p:spPr>
             <a:xfrm>
-              <a:off x="5864964" y="5721039"/>
+              <a:off x="5255189" y="5721039"/>
               <a:ext cx="0" cy="34794"/>
             </a:xfrm>
             <a:custGeom>
@@ -64798,7 +64798,7 @@
           </p:nvSpPr>
           <p:spPr>
             <a:xfrm>
-              <a:off x="6634066" y="5721039"/>
+              <a:off x="6024291" y="5721039"/>
               <a:ext cx="0" cy="34794"/>
             </a:xfrm>
             <a:custGeom>
@@ -64838,7 +64838,7 @@
           </p:nvSpPr>
           <p:spPr>
             <a:xfrm>
-              <a:off x="3420407" y="5783669"/>
+              <a:off x="2810632" y="5783669"/>
               <a:ext cx="124358" cy="80101"/>
             </a:xfrm>
             <a:prstGeom prst="rect">
@@ -64884,7 +64884,7 @@
           </p:nvSpPr>
           <p:spPr>
             <a:xfrm>
-              <a:off x="3544766" y="5765290"/>
+              <a:off x="2934990" y="5765290"/>
               <a:ext cx="44714" cy="98480"/>
             </a:xfrm>
             <a:prstGeom prst="rect">
@@ -64930,7 +64930,7 @@
           </p:nvSpPr>
           <p:spPr>
             <a:xfrm>
-              <a:off x="3589480" y="5783669"/>
+              <a:off x="2979704" y="5783669"/>
               <a:ext cx="105430" cy="80101"/>
             </a:xfrm>
             <a:prstGeom prst="rect">
@@ -64976,7 +64976,7 @@
           </p:nvSpPr>
           <p:spPr>
             <a:xfrm>
-              <a:off x="4189509" y="5783669"/>
+              <a:off x="3579734" y="5783669"/>
               <a:ext cx="124358" cy="80101"/>
             </a:xfrm>
             <a:prstGeom prst="rect">
@@ -65022,7 +65022,7 @@
           </p:nvSpPr>
           <p:spPr>
             <a:xfrm>
-              <a:off x="4313868" y="5765290"/>
+              <a:off x="3704092" y="5765290"/>
               <a:ext cx="44714" cy="98480"/>
             </a:xfrm>
             <a:prstGeom prst="rect">
@@ -65068,7 +65068,7 @@
           </p:nvSpPr>
           <p:spPr>
             <a:xfrm>
-              <a:off x="4358582" y="5783669"/>
+              <a:off x="3748806" y="5783669"/>
               <a:ext cx="105430" cy="80101"/>
             </a:xfrm>
             <a:prstGeom prst="rect">
@@ -65114,7 +65114,7 @@
           </p:nvSpPr>
           <p:spPr>
             <a:xfrm>
-              <a:off x="4958611" y="5783669"/>
+              <a:off x="4348835" y="5783669"/>
               <a:ext cx="124358" cy="80101"/>
             </a:xfrm>
             <a:prstGeom prst="rect">
@@ -65160,7 +65160,7 @@
           </p:nvSpPr>
           <p:spPr>
             <a:xfrm>
-              <a:off x="5082969" y="5765290"/>
+              <a:off x="4473194" y="5765290"/>
               <a:ext cx="44714" cy="98480"/>
             </a:xfrm>
             <a:prstGeom prst="rect">
@@ -65206,7 +65206,7 @@
           </p:nvSpPr>
           <p:spPr>
             <a:xfrm>
-              <a:off x="5127684" y="5783669"/>
+              <a:off x="4517908" y="5783669"/>
               <a:ext cx="105430" cy="80101"/>
             </a:xfrm>
             <a:prstGeom prst="rect">
@@ -65252,7 +65252,7 @@
           </p:nvSpPr>
           <p:spPr>
             <a:xfrm>
-              <a:off x="5727713" y="5783669"/>
+              <a:off x="5117937" y="5783669"/>
               <a:ext cx="124358" cy="80101"/>
             </a:xfrm>
             <a:prstGeom prst="rect">
@@ -65298,7 +65298,7 @@
           </p:nvSpPr>
           <p:spPr>
             <a:xfrm>
-              <a:off x="5852071" y="5765290"/>
+              <a:off x="5242296" y="5765290"/>
               <a:ext cx="44714" cy="98480"/>
             </a:xfrm>
             <a:prstGeom prst="rect">
@@ -65344,7 +65344,7 @@
           </p:nvSpPr>
           <p:spPr>
             <a:xfrm>
-              <a:off x="5896785" y="5783669"/>
+              <a:off x="5287010" y="5783669"/>
               <a:ext cx="105430" cy="80101"/>
             </a:xfrm>
             <a:prstGeom prst="rect">
@@ -65390,7 +65390,7 @@
           </p:nvSpPr>
           <p:spPr>
             <a:xfrm>
-              <a:off x="6496815" y="5783669"/>
+              <a:off x="5887039" y="5783669"/>
               <a:ext cx="124358" cy="80101"/>
             </a:xfrm>
             <a:prstGeom prst="rect">
@@ -65436,7 +65436,7 @@
           </p:nvSpPr>
           <p:spPr>
             <a:xfrm>
-              <a:off x="6621173" y="5765290"/>
+              <a:off x="6011398" y="5765290"/>
               <a:ext cx="44714" cy="98480"/>
             </a:xfrm>
             <a:prstGeom prst="rect">
@@ -65482,7 +65482,7 @@
           </p:nvSpPr>
           <p:spPr>
             <a:xfrm>
-              <a:off x="6665887" y="5783669"/>
+              <a:off x="6056112" y="5783669"/>
               <a:ext cx="105430" cy="80101"/>
             </a:xfrm>
             <a:prstGeom prst="rect">
@@ -65528,7 +65528,7 @@
           </p:nvSpPr>
           <p:spPr>
             <a:xfrm>
-              <a:off x="4550806" y="5925448"/>
+              <a:off x="3941030" y="5925448"/>
               <a:ext cx="613836" cy="100218"/>
             </a:xfrm>
             <a:prstGeom prst="rect">
@@ -65574,7 +65574,7 @@
           </p:nvSpPr>
           <p:spPr>
             <a:xfrm rot="-5400000">
-              <a:off x="2129021" y="3758692"/>
+              <a:off x="1519246" y="3758692"/>
               <a:ext cx="497159" cy="100218"/>
             </a:xfrm>
             <a:prstGeom prst="rect">
@@ -65614,13 +65614,541 @@
         </p:sp>
         <p:sp>
           <p:nvSpPr>
-            <p:cNvPr id="91" name="tx91"/>
-            <p:cNvSpPr/>
-            <p:nvPr/>
-          </p:nvSpPr>
-          <p:spPr>
-            <a:xfrm>
-              <a:off x="2898941" y="1669789"/>
+            <p:cNvPr id="91" name="rc91"/>
+            <p:cNvSpPr/>
+            <p:nvPr/>
+          </p:nvSpPr>
+          <p:spPr>
+            <a:xfrm>
+              <a:off x="6345910" y="3199943"/>
+              <a:ext cx="1080373" cy="1217716"/>
+            </a:xfrm>
+            <a:prstGeom prst="rect">
+              <a:avLst/>
+            </a:prstGeom>
+            <a:solidFill>
+              <a:srgbClr val="FFFFFF">
+                <a:alpha val="100000"/>
+              </a:srgbClr>
+            </a:solidFill>
+          </p:spPr>
+          <p:txBody>
+            <a:bodyPr/>
+            <a:lstStyle/>
+            <a:p/>
+          </p:txBody>
+        </p:sp>
+        <p:sp>
+          <p:nvSpPr>
+            <p:cNvPr id="92" name="tx92"/>
+            <p:cNvSpPr/>
+            <p:nvPr/>
+          </p:nvSpPr>
+          <p:spPr>
+            <a:xfrm>
+              <a:off x="6415499" y="3284985"/>
+              <a:ext cx="240670" cy="100218"/>
+            </a:xfrm>
+            <a:prstGeom prst="rect">
+              <a:avLst/>
+            </a:prstGeom>
+            <a:noFill/>
+          </p:spPr>
+          <p:txBody>
+            <a:bodyPr lIns="0" rIns="0" tIns="0" bIns="0" anchorCtr="1" anchor="ctr" wrap="none"/>
+            <a:lstStyle/>
+            <a:p>
+              <a:pPr algn="l" marL="0" marR="0" indent="0">
+                <a:lnSpc>
+                  <a:spcPts val="1100"/>
+                </a:lnSpc>
+                <a:spcBef>
+                  <a:spcPts val="0"/>
+                </a:spcBef>
+                <a:spcAft>
+                  <a:spcPts val="0"/>
+                </a:spcAft>
+              </a:pPr>
+              <a:r>
+                <a:rPr sz="1100">
+                  <a:solidFill>
+                    <a:srgbClr val="000000">
+                      <a:alpha val="100000"/>
+                    </a:srgbClr>
+                  </a:solidFill>
+                  <a:latin typeface="Helvetica"/>
+                  <a:cs typeface="Helvetica"/>
+                </a:rPr>
+                <a:t>Site</a:t>
+              </a:r>
+            </a:p>
+          </p:txBody>
+        </p:sp>
+        <p:sp>
+          <p:nvSpPr>
+            <p:cNvPr id="93" name="rc93"/>
+            <p:cNvSpPr/>
+            <p:nvPr/>
+          </p:nvSpPr>
+          <p:spPr>
+            <a:xfrm>
+              <a:off x="6415499" y="3470246"/>
+              <a:ext cx="219455" cy="219456"/>
+            </a:xfrm>
+            <a:prstGeom prst="rect">
+              <a:avLst/>
+            </a:prstGeom>
+            <a:solidFill>
+              <a:srgbClr val="FFFFFF">
+                <a:alpha val="100000"/>
+              </a:srgbClr>
+            </a:solidFill>
+          </p:spPr>
+          <p:txBody>
+            <a:bodyPr/>
+            <a:lstStyle/>
+            <a:p/>
+          </p:txBody>
+        </p:sp>
+        <p:sp>
+          <p:nvSpPr>
+            <p:cNvPr id="94" name="pt94"/>
+            <p:cNvSpPr/>
+            <p:nvPr/>
+          </p:nvSpPr>
+          <p:spPr>
+            <a:xfrm>
+              <a:off x="6452974" y="3507721"/>
+              <a:ext cx="144506" cy="144506"/>
+            </a:xfrm>
+            <a:prstGeom prst="ellipse">
+              <a:avLst/>
+            </a:prstGeom>
+            <a:solidFill>
+              <a:srgbClr val="3155A9">
+                <a:alpha val="100000"/>
+              </a:srgbClr>
+            </a:solidFill>
+            <a:ln w="9000" cap="rnd">
+              <a:solidFill>
+                <a:srgbClr val="000000">
+                  <a:alpha val="100000"/>
+                </a:srgbClr>
+              </a:solidFill>
+              <a:prstDash val="solid"/>
+              <a:round/>
+            </a:ln>
+          </p:spPr>
+          <p:txBody>
+            <a:bodyPr/>
+            <a:lstStyle/>
+            <a:p/>
+          </p:txBody>
+        </p:sp>
+        <p:sp>
+          <p:nvSpPr>
+            <p:cNvPr id="95" name="rc95"/>
+            <p:cNvSpPr/>
+            <p:nvPr/>
+          </p:nvSpPr>
+          <p:spPr>
+            <a:xfrm>
+              <a:off x="6415499" y="3689702"/>
+              <a:ext cx="219455" cy="219455"/>
+            </a:xfrm>
+            <a:prstGeom prst="rect">
+              <a:avLst/>
+            </a:prstGeom>
+            <a:solidFill>
+              <a:srgbClr val="FFFFFF">
+                <a:alpha val="100000"/>
+              </a:srgbClr>
+            </a:solidFill>
+          </p:spPr>
+          <p:txBody>
+            <a:bodyPr/>
+            <a:lstStyle/>
+            <a:p/>
+          </p:txBody>
+        </p:sp>
+        <p:sp>
+          <p:nvSpPr>
+            <p:cNvPr id="96" name="rc96"/>
+            <p:cNvSpPr/>
+            <p:nvPr/>
+          </p:nvSpPr>
+          <p:spPr>
+            <a:xfrm>
+              <a:off x="6461194" y="3735397"/>
+              <a:ext cx="128065" cy="128065"/>
+            </a:xfrm>
+            <a:prstGeom prst="rect">
+              <a:avLst/>
+            </a:prstGeom>
+            <a:solidFill>
+              <a:srgbClr val="FFA500">
+                <a:alpha val="100000"/>
+              </a:srgbClr>
+            </a:solidFill>
+            <a:ln w="9000" cap="rnd">
+              <a:solidFill>
+                <a:srgbClr val="000000">
+                  <a:alpha val="100000"/>
+                </a:srgbClr>
+              </a:solidFill>
+              <a:prstDash val="solid"/>
+              <a:round/>
+            </a:ln>
+          </p:spPr>
+          <p:txBody>
+            <a:bodyPr/>
+            <a:lstStyle/>
+            <a:p/>
+          </p:txBody>
+        </p:sp>
+        <p:sp>
+          <p:nvSpPr>
+            <p:cNvPr id="97" name="rc97"/>
+            <p:cNvSpPr/>
+            <p:nvPr/>
+          </p:nvSpPr>
+          <p:spPr>
+            <a:xfrm>
+              <a:off x="6415499" y="3909158"/>
+              <a:ext cx="219455" cy="219455"/>
+            </a:xfrm>
+            <a:prstGeom prst="rect">
+              <a:avLst/>
+            </a:prstGeom>
+            <a:solidFill>
+              <a:srgbClr val="FFFFFF">
+                <a:alpha val="100000"/>
+              </a:srgbClr>
+            </a:solidFill>
+          </p:spPr>
+          <p:txBody>
+            <a:bodyPr/>
+            <a:lstStyle/>
+            <a:p/>
+          </p:txBody>
+        </p:sp>
+        <p:sp>
+          <p:nvSpPr>
+            <p:cNvPr id="98" name="pg98"/>
+            <p:cNvSpPr/>
+            <p:nvPr/>
+          </p:nvSpPr>
+          <p:spPr>
+            <a:xfrm>
+              <a:off x="6427918" y="3906524"/>
+              <a:ext cx="194617" cy="168543"/>
+            </a:xfrm>
+            <a:custGeom>
+              <a:avLst/>
+              <a:pathLst>
+                <a:path w="194617" h="168543">
+                  <a:moveTo>
+                    <a:pt x="97308" y="0"/>
+                  </a:moveTo>
+                  <a:lnTo>
+                    <a:pt x="194617" y="168543"/>
+                  </a:lnTo>
+                  <a:lnTo>
+                    <a:pt x="0" y="168543"/>
+                  </a:lnTo>
+                  <a:close/>
+                </a:path>
+              </a:pathLst>
+            </a:custGeom>
+            <a:solidFill>
+              <a:srgbClr val="00FA9A">
+                <a:alpha val="100000"/>
+              </a:srgbClr>
+            </a:solidFill>
+            <a:ln w="9000" cap="rnd">
+              <a:solidFill>
+                <a:srgbClr val="000000">
+                  <a:alpha val="100000"/>
+                </a:srgbClr>
+              </a:solidFill>
+              <a:prstDash val="solid"/>
+              <a:round/>
+            </a:ln>
+          </p:spPr>
+          <p:txBody>
+            <a:bodyPr/>
+            <a:lstStyle/>
+            <a:p/>
+          </p:txBody>
+        </p:sp>
+        <p:sp>
+          <p:nvSpPr>
+            <p:cNvPr id="99" name="rc99"/>
+            <p:cNvSpPr/>
+            <p:nvPr/>
+          </p:nvSpPr>
+          <p:spPr>
+            <a:xfrm>
+              <a:off x="6415499" y="4128614"/>
+              <a:ext cx="219455" cy="219455"/>
+            </a:xfrm>
+            <a:prstGeom prst="rect">
+              <a:avLst/>
+            </a:prstGeom>
+            <a:solidFill>
+              <a:srgbClr val="FFFFFF">
+                <a:alpha val="100000"/>
+              </a:srgbClr>
+            </a:solidFill>
+          </p:spPr>
+          <p:txBody>
+            <a:bodyPr/>
+            <a:lstStyle/>
+            <a:p/>
+          </p:txBody>
+        </p:sp>
+        <p:sp>
+          <p:nvSpPr>
+            <p:cNvPr id="100" name="pg100"/>
+            <p:cNvSpPr/>
+            <p:nvPr/>
+          </p:nvSpPr>
+          <p:spPr>
+            <a:xfrm>
+              <a:off x="6427918" y="4125980"/>
+              <a:ext cx="194617" cy="168543"/>
+            </a:xfrm>
+            <a:custGeom>
+              <a:avLst/>
+              <a:pathLst>
+                <a:path w="194617" h="168543">
+                  <a:moveTo>
+                    <a:pt x="97308" y="0"/>
+                  </a:moveTo>
+                  <a:lnTo>
+                    <a:pt x="194617" y="168543"/>
+                  </a:lnTo>
+                  <a:lnTo>
+                    <a:pt x="0" y="168543"/>
+                  </a:lnTo>
+                  <a:close/>
+                </a:path>
+              </a:pathLst>
+            </a:custGeom>
+            <a:solidFill>
+              <a:srgbClr val="1D90FF">
+                <a:alpha val="100000"/>
+              </a:srgbClr>
+            </a:solidFill>
+            <a:ln w="9000" cap="rnd">
+              <a:solidFill>
+                <a:srgbClr val="000000">
+                  <a:alpha val="100000"/>
+                </a:srgbClr>
+              </a:solidFill>
+              <a:prstDash val="solid"/>
+              <a:round/>
+            </a:ln>
+          </p:spPr>
+          <p:txBody>
+            <a:bodyPr/>
+            <a:lstStyle/>
+            <a:p/>
+          </p:txBody>
+        </p:sp>
+        <p:sp>
+          <p:nvSpPr>
+            <p:cNvPr id="101" name="tx101"/>
+            <p:cNvSpPr/>
+            <p:nvPr/>
+          </p:nvSpPr>
+          <p:spPr>
+            <a:xfrm>
+              <a:off x="6704544" y="3539923"/>
+              <a:ext cx="497159" cy="80101"/>
+            </a:xfrm>
+            <a:prstGeom prst="rect">
+              <a:avLst/>
+            </a:prstGeom>
+            <a:noFill/>
+          </p:spPr>
+          <p:txBody>
+            <a:bodyPr lIns="0" rIns="0" tIns="0" bIns="0" anchorCtr="1" anchor="ctr" wrap="none"/>
+            <a:lstStyle/>
+            <a:p>
+              <a:pPr algn="l" marL="0" marR="0" indent="0">
+                <a:lnSpc>
+                  <a:spcPts val="880"/>
+                </a:lnSpc>
+                <a:spcBef>
+                  <a:spcPts val="0"/>
+                </a:spcBef>
+                <a:spcAft>
+                  <a:spcPts val="0"/>
+                </a:spcAft>
+              </a:pPr>
+              <a:r>
+                <a:rPr sz="880">
+                  <a:solidFill>
+                    <a:srgbClr val="000000">
+                      <a:alpha val="100000"/>
+                    </a:srgbClr>
+                  </a:solidFill>
+                  <a:latin typeface="Helvetica"/>
+                  <a:cs typeface="Helvetica"/>
+                </a:rPr>
+                <a:t>Seascape</a:t>
+              </a:r>
+            </a:p>
+          </p:txBody>
+        </p:sp>
+        <p:sp>
+          <p:nvSpPr>
+            <p:cNvPr id="102" name="tx102"/>
+            <p:cNvSpPr/>
+            <p:nvPr/>
+          </p:nvSpPr>
+          <p:spPr>
+            <a:xfrm>
+              <a:off x="6704544" y="3759379"/>
+              <a:ext cx="652150" cy="80101"/>
+            </a:xfrm>
+            <a:prstGeom prst="rect">
+              <a:avLst/>
+            </a:prstGeom>
+            <a:noFill/>
+          </p:spPr>
+          <p:txBody>
+            <a:bodyPr lIns="0" rIns="0" tIns="0" bIns="0" anchorCtr="1" anchor="ctr" wrap="none"/>
+            <a:lstStyle/>
+            <a:p>
+              <a:pPr algn="l" marL="0" marR="0" indent="0">
+                <a:lnSpc>
+                  <a:spcPts val="880"/>
+                </a:lnSpc>
+                <a:spcBef>
+                  <a:spcPts val="0"/>
+                </a:spcBef>
+                <a:spcAft>
+                  <a:spcPts val="0"/>
+                </a:spcAft>
+              </a:pPr>
+              <a:r>
+                <a:rPr sz="880">
+                  <a:solidFill>
+                    <a:srgbClr val="000000">
+                      <a:alpha val="100000"/>
+                    </a:srgbClr>
+                  </a:solidFill>
+                  <a:latin typeface="Helvetica"/>
+                  <a:cs typeface="Helvetica"/>
+                </a:rPr>
+                <a:t>Experimental</a:t>
+              </a:r>
+            </a:p>
+          </p:txBody>
+        </p:sp>
+        <p:sp>
+          <p:nvSpPr>
+            <p:cNvPr id="103" name="tx103"/>
+            <p:cNvSpPr/>
+            <p:nvPr/>
+          </p:nvSpPr>
+          <p:spPr>
+            <a:xfrm>
+              <a:off x="6704544" y="3978835"/>
+              <a:ext cx="472013" cy="80101"/>
+            </a:xfrm>
+            <a:prstGeom prst="rect">
+              <a:avLst/>
+            </a:prstGeom>
+            <a:noFill/>
+          </p:spPr>
+          <p:txBody>
+            <a:bodyPr lIns="0" rIns="0" tIns="0" bIns="0" anchorCtr="1" anchor="ctr" wrap="none"/>
+            <a:lstStyle/>
+            <a:p>
+              <a:pPr algn="l" marL="0" marR="0" indent="0">
+                <a:lnSpc>
+                  <a:spcPts val="880"/>
+                </a:lnSpc>
+                <a:spcBef>
+                  <a:spcPts val="0"/>
+                </a:spcBef>
+                <a:spcAft>
+                  <a:spcPts val="0"/>
+                </a:spcAft>
+              </a:pPr>
+              <a:r>
+                <a:rPr sz="880">
+                  <a:solidFill>
+                    <a:srgbClr val="000000">
+                      <a:alpha val="100000"/>
+                    </a:srgbClr>
+                  </a:solidFill>
+                  <a:latin typeface="Helvetica"/>
+                  <a:cs typeface="Helvetica"/>
+                </a:rPr>
+                <a:t>Lewisetta</a:t>
+              </a:r>
+            </a:p>
+          </p:txBody>
+        </p:sp>
+        <p:sp>
+          <p:nvSpPr>
+            <p:cNvPr id="104" name="tx104"/>
+            <p:cNvSpPr/>
+            <p:nvPr/>
+          </p:nvSpPr>
+          <p:spPr>
+            <a:xfrm>
+              <a:off x="6704544" y="4198291"/>
+              <a:ext cx="521482" cy="80101"/>
+            </a:xfrm>
+            <a:prstGeom prst="rect">
+              <a:avLst/>
+            </a:prstGeom>
+            <a:noFill/>
+          </p:spPr>
+          <p:txBody>
+            <a:bodyPr lIns="0" rIns="0" tIns="0" bIns="0" anchorCtr="1" anchor="ctr" wrap="none"/>
+            <a:lstStyle/>
+            <a:p>
+              <a:pPr algn="l" marL="0" marR="0" indent="0">
+                <a:lnSpc>
+                  <a:spcPts val="880"/>
+                </a:lnSpc>
+                <a:spcBef>
+                  <a:spcPts val="0"/>
+                </a:spcBef>
+                <a:spcAft>
+                  <a:spcPts val="0"/>
+                </a:spcAft>
+              </a:pPr>
+              <a:r>
+                <a:rPr sz="880">
+                  <a:solidFill>
+                    <a:srgbClr val="000000">
+                      <a:alpha val="100000"/>
+                    </a:srgbClr>
+                  </a:solidFill>
+                  <a:latin typeface="Helvetica"/>
+                  <a:cs typeface="Helvetica"/>
+                </a:rPr>
+                <a:t>York River</a:t>
+              </a:r>
+            </a:p>
+          </p:txBody>
+        </p:sp>
+        <p:sp>
+          <p:nvSpPr>
+            <p:cNvPr id="105" name="tx105"/>
+            <p:cNvSpPr/>
+            <p:nvPr/>
+          </p:nvSpPr>
+          <p:spPr>
+            <a:xfrm>
+              <a:off x="2289166" y="1669789"/>
               <a:ext cx="2262591" cy="120152"/>
             </a:xfrm>
             <a:prstGeom prst="rect">

--- a/results/figures/site_maps.pptx
+++ b/results/figures/site_maps.pptx
@@ -54738,7 +54738,7 @@
           </p:nvSpPr>
           <p:spPr>
             <a:xfrm>
-              <a:off x="5695389" y="3195750"/>
+              <a:off x="5697081" y="3188187"/>
               <a:ext cx="144506" cy="144506"/>
             </a:xfrm>
             <a:prstGeom prst="ellipse">
@@ -54773,7 +54773,7 @@
           </p:nvSpPr>
           <p:spPr>
             <a:xfrm>
-              <a:off x="5697081" y="3188187"/>
+              <a:off x="4578135" y="4746265"/>
               <a:ext cx="144506" cy="144506"/>
             </a:xfrm>
             <a:prstGeom prst="ellipse">
@@ -54808,7 +54808,7 @@
           </p:nvSpPr>
           <p:spPr>
             <a:xfrm>
-              <a:off x="4578135" y="4746265"/>
+              <a:off x="3807967" y="4755688"/>
               <a:ext cx="144506" cy="144506"/>
             </a:xfrm>
             <a:prstGeom prst="ellipse">
@@ -54843,7 +54843,7 @@
           </p:nvSpPr>
           <p:spPr>
             <a:xfrm>
-              <a:off x="3807967" y="4755688"/>
+              <a:off x="5764374" y="3021048"/>
               <a:ext cx="144506" cy="144506"/>
             </a:xfrm>
             <a:prstGeom prst="ellipse">
@@ -54878,7 +54878,7 @@
           </p:nvSpPr>
           <p:spPr>
             <a:xfrm>
-              <a:off x="5764374" y="3021048"/>
+              <a:off x="5308174" y="3536459"/>
               <a:ext cx="144506" cy="144506"/>
             </a:xfrm>
             <a:prstGeom prst="ellipse">
@@ -54913,7 +54913,7 @@
           </p:nvSpPr>
           <p:spPr>
             <a:xfrm>
-              <a:off x="5308174" y="3536459"/>
+              <a:off x="5240587" y="3485855"/>
               <a:ext cx="144506" cy="144506"/>
             </a:xfrm>
             <a:prstGeom prst="ellipse">
@@ -54948,7 +54948,7 @@
           </p:nvSpPr>
           <p:spPr>
             <a:xfrm>
-              <a:off x="5240587" y="3485855"/>
+              <a:off x="6315652" y="2872406"/>
               <a:ext cx="144506" cy="144506"/>
             </a:xfrm>
             <a:prstGeom prst="ellipse">
@@ -54983,7 +54983,7 @@
           </p:nvSpPr>
           <p:spPr>
             <a:xfrm>
-              <a:off x="6315652" y="2872406"/>
+              <a:off x="3181293" y="4838053"/>
               <a:ext cx="144506" cy="144506"/>
             </a:xfrm>
             <a:prstGeom prst="ellipse">
@@ -55018,7 +55018,7 @@
           </p:nvSpPr>
           <p:spPr>
             <a:xfrm>
-              <a:off x="6316748" y="2870308"/>
+              <a:off x="5123546" y="3818085"/>
               <a:ext cx="144506" cy="144506"/>
             </a:xfrm>
             <a:prstGeom prst="ellipse">
@@ -55053,7 +55053,7 @@
           </p:nvSpPr>
           <p:spPr>
             <a:xfrm>
-              <a:off x="3181293" y="4838053"/>
+              <a:off x="5115404" y="3806165"/>
               <a:ext cx="144506" cy="144506"/>
             </a:xfrm>
             <a:prstGeom prst="ellipse">
@@ -55088,7 +55088,7 @@
           </p:nvSpPr>
           <p:spPr>
             <a:xfrm>
-              <a:off x="5123546" y="3818085"/>
+              <a:off x="5236913" y="3996038"/>
               <a:ext cx="144506" cy="144506"/>
             </a:xfrm>
             <a:prstGeom prst="ellipse">
@@ -55123,7 +55123,7 @@
           </p:nvSpPr>
           <p:spPr>
             <a:xfrm>
-              <a:off x="5115404" y="3806165"/>
+              <a:off x="5077225" y="3639682"/>
               <a:ext cx="144506" cy="144506"/>
             </a:xfrm>
             <a:prstGeom prst="ellipse">
@@ -55158,7 +55158,7 @@
           </p:nvSpPr>
           <p:spPr>
             <a:xfrm>
-              <a:off x="5236913" y="3996038"/>
+              <a:off x="5910367" y="2842694"/>
               <a:ext cx="144506" cy="144506"/>
             </a:xfrm>
             <a:prstGeom prst="ellipse">
@@ -55193,7 +55193,7 @@
           </p:nvSpPr>
           <p:spPr>
             <a:xfrm>
-              <a:off x="6653971" y="2545426"/>
+              <a:off x="5867473" y="2869761"/>
               <a:ext cx="144506" cy="144506"/>
             </a:xfrm>
             <a:prstGeom prst="ellipse">
@@ -55228,7 +55228,7 @@
           </p:nvSpPr>
           <p:spPr>
             <a:xfrm>
-              <a:off x="5077225" y="3639682"/>
+              <a:off x="4977967" y="4227762"/>
               <a:ext cx="144506" cy="144506"/>
             </a:xfrm>
             <a:prstGeom prst="ellipse">
@@ -55263,7 +55263,7 @@
           </p:nvSpPr>
           <p:spPr>
             <a:xfrm>
-              <a:off x="5910367" y="2842694"/>
+              <a:off x="4969215" y="4253201"/>
               <a:ext cx="144506" cy="144506"/>
             </a:xfrm>
             <a:prstGeom prst="ellipse">
@@ -55298,7 +55298,7 @@
           </p:nvSpPr>
           <p:spPr>
             <a:xfrm>
-              <a:off x="5867473" y="2869761"/>
+              <a:off x="5495878" y="3245996"/>
               <a:ext cx="144506" cy="144506"/>
             </a:xfrm>
             <a:prstGeom prst="ellipse">
@@ -55333,7 +55333,7 @@
           </p:nvSpPr>
           <p:spPr>
             <a:xfrm>
-              <a:off x="4977967" y="4227762"/>
+              <a:off x="4154622" y="4851490"/>
               <a:ext cx="144506" cy="144506"/>
             </a:xfrm>
             <a:prstGeom prst="ellipse">
@@ -55368,7 +55368,7 @@
           </p:nvSpPr>
           <p:spPr>
             <a:xfrm>
-              <a:off x="4969215" y="4253201"/>
+              <a:off x="4202904" y="4850569"/>
               <a:ext cx="144506" cy="144506"/>
             </a:xfrm>
             <a:prstGeom prst="ellipse">
@@ -55397,147 +55397,7 @@
         </p:sp>
         <p:sp>
           <p:nvSpPr>
-            <p:cNvPr id="1531" name="pt1531"/>
-            <p:cNvSpPr/>
-            <p:nvPr/>
-          </p:nvSpPr>
-          <p:spPr>
-            <a:xfrm>
-              <a:off x="5495878" y="3245996"/>
-              <a:ext cx="144506" cy="144506"/>
-            </a:xfrm>
-            <a:prstGeom prst="ellipse">
-              <a:avLst/>
-            </a:prstGeom>
-            <a:solidFill>
-              <a:srgbClr val="3155A9">
-                <a:alpha val="100000"/>
-              </a:srgbClr>
-            </a:solidFill>
-            <a:ln w="9000" cap="rnd">
-              <a:solidFill>
-                <a:srgbClr val="000000">
-                  <a:alpha val="100000"/>
-                </a:srgbClr>
-              </a:solidFill>
-              <a:prstDash val="solid"/>
-              <a:round/>
-            </a:ln>
-          </p:spPr>
-          <p:txBody>
-            <a:bodyPr/>
-            <a:lstStyle/>
-            <a:p/>
-          </p:txBody>
-        </p:sp>
-        <p:sp>
-          <p:nvSpPr>
-            <p:cNvPr id="1532" name="pt1532"/>
-            <p:cNvSpPr/>
-            <p:nvPr/>
-          </p:nvSpPr>
-          <p:spPr>
-            <a:xfrm>
-              <a:off x="4154622" y="4851490"/>
-              <a:ext cx="144506" cy="144506"/>
-            </a:xfrm>
-            <a:prstGeom prst="ellipse">
-              <a:avLst/>
-            </a:prstGeom>
-            <a:solidFill>
-              <a:srgbClr val="3155A9">
-                <a:alpha val="100000"/>
-              </a:srgbClr>
-            </a:solidFill>
-            <a:ln w="9000" cap="rnd">
-              <a:solidFill>
-                <a:srgbClr val="000000">
-                  <a:alpha val="100000"/>
-                </a:srgbClr>
-              </a:solidFill>
-              <a:prstDash val="solid"/>
-              <a:round/>
-            </a:ln>
-          </p:spPr>
-          <p:txBody>
-            <a:bodyPr/>
-            <a:lstStyle/>
-            <a:p/>
-          </p:txBody>
-        </p:sp>
-        <p:sp>
-          <p:nvSpPr>
-            <p:cNvPr id="1533" name="pt1533"/>
-            <p:cNvSpPr/>
-            <p:nvPr/>
-          </p:nvSpPr>
-          <p:spPr>
-            <a:xfrm>
-              <a:off x="4202904" y="4850569"/>
-              <a:ext cx="144506" cy="144506"/>
-            </a:xfrm>
-            <a:prstGeom prst="ellipse">
-              <a:avLst/>
-            </a:prstGeom>
-            <a:solidFill>
-              <a:srgbClr val="3155A9">
-                <a:alpha val="100000"/>
-              </a:srgbClr>
-            </a:solidFill>
-            <a:ln w="9000" cap="rnd">
-              <a:solidFill>
-                <a:srgbClr val="000000">
-                  <a:alpha val="100000"/>
-                </a:srgbClr>
-              </a:solidFill>
-              <a:prstDash val="solid"/>
-              <a:round/>
-            </a:ln>
-          </p:spPr>
-          <p:txBody>
-            <a:bodyPr/>
-            <a:lstStyle/>
-            <a:p/>
-          </p:txBody>
-        </p:sp>
-        <p:sp>
-          <p:nvSpPr>
-            <p:cNvPr id="1534" name="pt1534"/>
-            <p:cNvSpPr/>
-            <p:nvPr/>
-          </p:nvSpPr>
-          <p:spPr>
-            <a:xfrm>
-              <a:off x="5568579" y="3228402"/>
-              <a:ext cx="144506" cy="144506"/>
-            </a:xfrm>
-            <a:prstGeom prst="ellipse">
-              <a:avLst/>
-            </a:prstGeom>
-            <a:solidFill>
-              <a:srgbClr val="3155A9">
-                <a:alpha val="100000"/>
-              </a:srgbClr>
-            </a:solidFill>
-            <a:ln w="9000" cap="rnd">
-              <a:solidFill>
-                <a:srgbClr val="000000">
-                  <a:alpha val="100000"/>
-                </a:srgbClr>
-              </a:solidFill>
-              <a:prstDash val="solid"/>
-              <a:round/>
-            </a:ln>
-          </p:spPr>
-          <p:txBody>
-            <a:bodyPr/>
-            <a:lstStyle/>
-            <a:p/>
-          </p:txBody>
-        </p:sp>
-        <p:sp>
-          <p:nvSpPr>
-            <p:cNvPr id="1535" name="rc1535"/>
+            <p:cNvPr id="1531" name="rc1531"/>
             <p:cNvSpPr/>
             <p:nvPr/>
           </p:nvSpPr>
@@ -55572,7 +55432,7 @@
         </p:sp>
         <p:sp>
           <p:nvSpPr>
-            <p:cNvPr id="1536" name="rc1536"/>
+            <p:cNvPr id="1532" name="rc1532"/>
             <p:cNvSpPr/>
             <p:nvPr/>
           </p:nvSpPr>
@@ -55607,7 +55467,7 @@
         </p:sp>
         <p:sp>
           <p:nvSpPr>
-            <p:cNvPr id="1537" name="rc1537"/>
+            <p:cNvPr id="1533" name="rc1533"/>
             <p:cNvSpPr/>
             <p:nvPr/>
           </p:nvSpPr>
@@ -55642,7 +55502,7 @@
         </p:sp>
         <p:sp>
           <p:nvSpPr>
-            <p:cNvPr id="1538" name="rc1538"/>
+            <p:cNvPr id="1534" name="rc1534"/>
             <p:cNvSpPr/>
             <p:nvPr/>
           </p:nvSpPr>
@@ -55677,7 +55537,7 @@
         </p:sp>
         <p:sp>
           <p:nvSpPr>
-            <p:cNvPr id="1539" name="rc1539"/>
+            <p:cNvPr id="1535" name="rc1535"/>
             <p:cNvSpPr/>
             <p:nvPr/>
           </p:nvSpPr>
@@ -55712,7 +55572,7 @@
         </p:sp>
         <p:sp>
           <p:nvSpPr>
-            <p:cNvPr id="1540" name="rc1540"/>
+            <p:cNvPr id="1536" name="rc1536"/>
             <p:cNvSpPr/>
             <p:nvPr/>
           </p:nvSpPr>
@@ -55747,7 +55607,7 @@
         </p:sp>
         <p:sp>
           <p:nvSpPr>
-            <p:cNvPr id="1541" name="rc1541"/>
+            <p:cNvPr id="1537" name="rc1537"/>
             <p:cNvSpPr/>
             <p:nvPr/>
           </p:nvSpPr>
@@ -55782,7 +55642,7 @@
         </p:sp>
         <p:sp>
           <p:nvSpPr>
-            <p:cNvPr id="1542" name="rc1542"/>
+            <p:cNvPr id="1538" name="rc1538"/>
             <p:cNvSpPr/>
             <p:nvPr/>
           </p:nvSpPr>
@@ -55817,24 +55677,24 @@
         </p:sp>
         <p:sp>
           <p:nvSpPr>
-            <p:cNvPr id="1543" name="pl1543"/>
-            <p:cNvSpPr/>
-            <p:nvPr/>
-          </p:nvSpPr>
-          <p:spPr>
-            <a:xfrm>
-              <a:off x="2882250" y="4927853"/>
-              <a:ext cx="3674" cy="207552"/>
+            <p:cNvPr id="1539" name="pl1539"/>
+            <p:cNvSpPr/>
+            <p:nvPr/>
+          </p:nvSpPr>
+          <p:spPr>
+            <a:xfrm>
+              <a:off x="2882250" y="4929212"/>
+              <a:ext cx="3673" cy="206193"/>
             </a:xfrm>
             <a:custGeom>
               <a:avLst/>
               <a:pathLst>
-                <a:path w="3674" h="207552">
+                <a:path w="3673" h="206193">
                   <a:moveTo>
                     <a:pt x="0" y="0"/>
                   </a:moveTo>
                   <a:lnTo>
-                    <a:pt x="3674" y="207552"/>
+                    <a:pt x="3673" y="206193"/>
                   </a:lnTo>
                 </a:path>
               </a:pathLst>
@@ -55857,24 +55717,24 @@
         </p:sp>
         <p:sp>
           <p:nvSpPr>
-            <p:cNvPr id="1544" name="pl1544"/>
-            <p:cNvSpPr/>
-            <p:nvPr/>
-          </p:nvSpPr>
-          <p:spPr>
-            <a:xfrm>
-              <a:off x="3459099" y="4644472"/>
-              <a:ext cx="125021" cy="328267"/>
+            <p:cNvPr id="1540" name="pl1540"/>
+            <p:cNvSpPr/>
+            <p:nvPr/>
+          </p:nvSpPr>
+          <p:spPr>
+            <a:xfrm>
+              <a:off x="3457819" y="4646144"/>
+              <a:ext cx="126236" cy="326611"/>
             </a:xfrm>
             <a:custGeom>
               <a:avLst/>
               <a:pathLst>
-                <a:path w="125021" h="328267">
+                <a:path w="126236" h="326611">
                   <a:moveTo>
                     <a:pt x="0" y="0"/>
                   </a:moveTo>
                   <a:lnTo>
-                    <a:pt x="125021" y="328267"/>
+                    <a:pt x="126236" y="326611"/>
                   </a:lnTo>
                 </a:path>
               </a:pathLst>
@@ -55897,24 +55757,24 @@
         </p:sp>
         <p:sp>
           <p:nvSpPr>
-            <p:cNvPr id="1545" name="pl1545"/>
-            <p:cNvSpPr/>
-            <p:nvPr/>
-          </p:nvSpPr>
-          <p:spPr>
-            <a:xfrm>
-              <a:off x="4468118" y="4564007"/>
-              <a:ext cx="173779" cy="242905"/>
+            <p:cNvPr id="1541" name="pl1541"/>
+            <p:cNvSpPr/>
+            <p:nvPr/>
+          </p:nvSpPr>
+          <p:spPr>
+            <a:xfrm>
+              <a:off x="4468121" y="4564000"/>
+              <a:ext cx="173776" cy="242912"/>
             </a:xfrm>
             <a:custGeom>
               <a:avLst/>
               <a:pathLst>
-                <a:path w="173779" h="242905">
+                <a:path w="173776" h="242912">
                   <a:moveTo>
                     <a:pt x="0" y="0"/>
                   </a:moveTo>
                   <a:lnTo>
-                    <a:pt x="173779" y="242905"/>
+                    <a:pt x="173776" y="242912"/>
                   </a:lnTo>
                 </a:path>
               </a:pathLst>
@@ -55937,24 +55797,24 @@
         </p:sp>
         <p:sp>
           <p:nvSpPr>
-            <p:cNvPr id="1546" name="pl1546"/>
-            <p:cNvSpPr/>
-            <p:nvPr/>
-          </p:nvSpPr>
-          <p:spPr>
-            <a:xfrm>
-              <a:off x="5785191" y="2838477"/>
-              <a:ext cx="40372" cy="199621"/>
+            <p:cNvPr id="1542" name="pl1542"/>
+            <p:cNvSpPr/>
+            <p:nvPr/>
+          </p:nvSpPr>
+          <p:spPr>
+            <a:xfrm>
+              <a:off x="5779285" y="2839340"/>
+              <a:ext cx="45915" cy="198810"/>
             </a:xfrm>
             <a:custGeom>
               <a:avLst/>
               <a:pathLst>
-                <a:path w="40372" h="199621">
+                <a:path w="45915" h="198810">
                   <a:moveTo>
                     <a:pt x="0" y="0"/>
                   </a:moveTo>
                   <a:lnTo>
-                    <a:pt x="40372" y="199621"/>
+                    <a:pt x="45915" y="198810"/>
                   </a:lnTo>
                 </a:path>
               </a:pathLst>
@@ -55977,24 +55837,24 @@
         </p:sp>
         <p:sp>
           <p:nvSpPr>
-            <p:cNvPr id="1547" name="pl1547"/>
-            <p:cNvSpPr/>
-            <p:nvPr/>
-          </p:nvSpPr>
-          <p:spPr>
-            <a:xfrm>
-              <a:off x="5864123" y="2615021"/>
-              <a:ext cx="111659" cy="292673"/>
+            <p:cNvPr id="1543" name="pl1543"/>
+            <p:cNvSpPr/>
+            <p:nvPr/>
+          </p:nvSpPr>
+          <p:spPr>
+            <a:xfrm>
+              <a:off x="5858984" y="2616148"/>
+              <a:ext cx="116589" cy="291601"/>
             </a:xfrm>
             <a:custGeom>
               <a:avLst/>
               <a:pathLst>
-                <a:path w="111659" h="292673">
+                <a:path w="116589" h="291601">
                   <a:moveTo>
                     <a:pt x="0" y="0"/>
                   </a:moveTo>
                   <a:lnTo>
-                    <a:pt x="111659" y="292673"/>
+                    <a:pt x="116589" y="291601"/>
                   </a:lnTo>
                 </a:path>
               </a:pathLst>
@@ -56017,13 +55877,13 @@
         </p:sp>
         <p:sp>
           <p:nvSpPr>
-            <p:cNvPr id="1548" name="pg1548"/>
-            <p:cNvSpPr/>
-            <p:nvPr/>
-          </p:nvSpPr>
-          <p:spPr>
-            <a:xfrm>
-              <a:off x="2618628" y="4735921"/>
+            <p:cNvPr id="1544" name="pg1544"/>
+            <p:cNvSpPr/>
+            <p:nvPr/>
+          </p:nvSpPr>
+          <p:spPr>
+            <a:xfrm>
+              <a:off x="2618628" y="4737279"/>
               <a:ext cx="527243" cy="191932"/>
             </a:xfrm>
             <a:custGeom>
@@ -56070,7 +55930,7 @@
                     <a:pt x="527243" y="164500"/>
                   </a:lnTo>
                   <a:lnTo>
-                    <a:pt x="527243" y="27432"/>
+                    <a:pt x="527243" y="27431"/>
                   </a:lnTo>
                   <a:lnTo>
                     <a:pt x="526887" y="23031"/>
@@ -56139,7 +55999,7 @@
                     <a:pt x="88" y="25224"/>
                   </a:lnTo>
                   <a:lnTo>
-                    <a:pt x="0" y="27432"/>
+                    <a:pt x="0" y="27431"/>
                   </a:lnTo>
                   <a:lnTo>
                     <a:pt x="0" y="164500"/>
@@ -56204,13 +56064,13 @@
         </p:sp>
         <p:sp>
           <p:nvSpPr>
-            <p:cNvPr id="1549" name="tx1549"/>
-            <p:cNvSpPr/>
-            <p:nvPr/>
-          </p:nvSpPr>
-          <p:spPr>
-            <a:xfrm>
-              <a:off x="2664348" y="4781641"/>
+            <p:cNvPr id="1545" name="tx1545"/>
+            <p:cNvSpPr/>
+            <p:nvPr/>
+          </p:nvSpPr>
+          <p:spPr>
+            <a:xfrm>
+              <a:off x="2664348" y="4782999"/>
               <a:ext cx="435803" cy="100492"/>
             </a:xfrm>
             <a:prstGeom prst="rect">
@@ -56250,13 +56110,13 @@
         </p:sp>
         <p:sp>
           <p:nvSpPr>
-            <p:cNvPr id="1550" name="pg1550"/>
-            <p:cNvSpPr/>
-            <p:nvPr/>
-          </p:nvSpPr>
-          <p:spPr>
-            <a:xfrm>
-              <a:off x="3192592" y="4452539"/>
+            <p:cNvPr id="1546" name="pg1546"/>
+            <p:cNvSpPr/>
+            <p:nvPr/>
+          </p:nvSpPr>
+          <p:spPr>
+            <a:xfrm>
+              <a:off x="3191025" y="4454211"/>
               <a:ext cx="519562" cy="191932"/>
             </a:xfrm>
             <a:custGeom>
@@ -56264,7 +56124,7 @@
               <a:pathLst>
                 <a:path w="519562" h="191932">
                   <a:moveTo>
-                    <a:pt x="27431" y="191932"/>
+                    <a:pt x="27432" y="191932"/>
                   </a:moveTo>
                   <a:lnTo>
                     <a:pt x="492130" y="191932"/>
@@ -56336,7 +56196,7 @@
                     <a:pt x="492130" y="0"/>
                   </a:lnTo>
                   <a:lnTo>
-                    <a:pt x="27431" y="0"/>
+                    <a:pt x="27432" y="0"/>
                   </a:lnTo>
                   <a:lnTo>
                     <a:pt x="30738" y="200"/>
@@ -56437,13 +56297,13 @@
         </p:sp>
         <p:sp>
           <p:nvSpPr>
-            <p:cNvPr id="1551" name="tx1551"/>
-            <p:cNvSpPr/>
-            <p:nvPr/>
-          </p:nvSpPr>
-          <p:spPr>
-            <a:xfrm>
-              <a:off x="3238312" y="4498259"/>
+            <p:cNvPr id="1547" name="tx1547"/>
+            <p:cNvSpPr/>
+            <p:nvPr/>
+          </p:nvSpPr>
+          <p:spPr>
+            <a:xfrm>
+              <a:off x="3236745" y="4499931"/>
               <a:ext cx="428122" cy="100492"/>
             </a:xfrm>
             <a:prstGeom prst="rect">
@@ -56483,13 +56343,13 @@
         </p:sp>
         <p:sp>
           <p:nvSpPr>
-            <p:cNvPr id="1552" name="pg1552"/>
-            <p:cNvSpPr/>
-            <p:nvPr/>
-          </p:nvSpPr>
-          <p:spPr>
-            <a:xfrm>
-              <a:off x="4170412" y="4372075"/>
+            <p:cNvPr id="1548" name="pg1548"/>
+            <p:cNvSpPr/>
+            <p:nvPr/>
+          </p:nvSpPr>
+          <p:spPr>
+            <a:xfrm>
+              <a:off x="4170421" y="4372067"/>
               <a:ext cx="511698" cy="191932"/>
             </a:xfrm>
             <a:custGeom>
@@ -56497,7 +56357,7 @@
               <a:pathLst>
                 <a:path w="511698" h="191932">
                   <a:moveTo>
-                    <a:pt x="27432" y="191932"/>
+                    <a:pt x="27431" y="191932"/>
                   </a:moveTo>
                   <a:lnTo>
                     <a:pt x="484266" y="191932"/>
@@ -56569,7 +56429,7 @@
                     <a:pt x="484266" y="0"/>
                   </a:lnTo>
                   <a:lnTo>
-                    <a:pt x="27432" y="0"/>
+                    <a:pt x="27431" y="0"/>
                   </a:lnTo>
                   <a:lnTo>
                     <a:pt x="30738" y="200"/>
@@ -56670,13 +56530,13 @@
         </p:sp>
         <p:sp>
           <p:nvSpPr>
-            <p:cNvPr id="1553" name="tx1553"/>
-            <p:cNvSpPr/>
-            <p:nvPr/>
-          </p:nvSpPr>
-          <p:spPr>
-            <a:xfrm>
-              <a:off x="4216132" y="4417795"/>
+            <p:cNvPr id="1549" name="tx1549"/>
+            <p:cNvSpPr/>
+            <p:nvPr/>
+          </p:nvSpPr>
+          <p:spPr>
+            <a:xfrm>
+              <a:off x="4216141" y="4417787"/>
               <a:ext cx="420258" cy="100492"/>
             </a:xfrm>
             <a:prstGeom prst="rect">
@@ -56716,13 +56576,13 @@
         </p:sp>
         <p:sp>
           <p:nvSpPr>
-            <p:cNvPr id="1554" name="pg1554"/>
-            <p:cNvSpPr/>
-            <p:nvPr/>
-          </p:nvSpPr>
-          <p:spPr>
-            <a:xfrm>
-              <a:off x="5234722" y="2706428"/>
+            <p:cNvPr id="1550" name="pg1550"/>
+            <p:cNvSpPr/>
+            <p:nvPr/>
+          </p:nvSpPr>
+          <p:spPr>
+            <a:xfrm>
+              <a:off x="5228816" y="2707424"/>
               <a:ext cx="550468" cy="191932"/>
             </a:xfrm>
             <a:custGeom>
@@ -56730,7 +56590,7 @@
               <a:pathLst>
                 <a:path w="550468" h="191932">
                   <a:moveTo>
-                    <a:pt x="27431" y="191932"/>
+                    <a:pt x="27432" y="191932"/>
                   </a:moveTo>
                   <a:lnTo>
                     <a:pt x="523036" y="191932"/>
@@ -56802,7 +56662,7 @@
                     <a:pt x="523036" y="0"/>
                   </a:lnTo>
                   <a:lnTo>
-                    <a:pt x="27431" y="0"/>
+                    <a:pt x="27432" y="0"/>
                   </a:lnTo>
                   <a:lnTo>
                     <a:pt x="30738" y="200"/>
@@ -56817,7 +56677,7 @@
                     <a:pt x="17704" y="1782"/>
                   </a:lnTo>
                   <a:lnTo>
-                    <a:pt x="13715" y="3675"/>
+                    <a:pt x="13716" y="3675"/>
                   </a:lnTo>
                   <a:lnTo>
                     <a:pt x="10082" y="6183"/>
@@ -56865,7 +56725,7 @@
                     <a:pt x="10082" y="185749"/>
                   </a:lnTo>
                   <a:lnTo>
-                    <a:pt x="13715" y="188257"/>
+                    <a:pt x="13716" y="188257"/>
                   </a:lnTo>
                   <a:lnTo>
                     <a:pt x="17704" y="190149"/>
@@ -56903,13 +56763,13 @@
         </p:sp>
         <p:sp>
           <p:nvSpPr>
-            <p:cNvPr id="1555" name="tx1555"/>
-            <p:cNvSpPr/>
-            <p:nvPr/>
-          </p:nvSpPr>
-          <p:spPr>
-            <a:xfrm>
-              <a:off x="5280442" y="2752148"/>
+            <p:cNvPr id="1551" name="tx1551"/>
+            <p:cNvSpPr/>
+            <p:nvPr/>
+          </p:nvSpPr>
+          <p:spPr>
+            <a:xfrm>
+              <a:off x="5274536" y="2753144"/>
               <a:ext cx="459028" cy="100492"/>
             </a:xfrm>
             <a:prstGeom prst="rect">
@@ -56949,13 +56809,13 @@
         </p:sp>
         <p:sp>
           <p:nvSpPr>
-            <p:cNvPr id="1556" name="pg1556"/>
-            <p:cNvSpPr/>
-            <p:nvPr/>
-          </p:nvSpPr>
-          <p:spPr>
-            <a:xfrm>
-              <a:off x="5578899" y="2423089"/>
+            <p:cNvPr id="1552" name="pg1552"/>
+            <p:cNvSpPr/>
+            <p:nvPr/>
+          </p:nvSpPr>
+          <p:spPr>
+            <a:xfrm>
+              <a:off x="5572817" y="2424215"/>
               <a:ext cx="558332" cy="191932"/>
             </a:xfrm>
             <a:custGeom>
@@ -56963,7 +56823,7 @@
               <a:pathLst>
                 <a:path w="558332" h="191932">
                   <a:moveTo>
-                    <a:pt x="27432" y="191932"/>
+                    <a:pt x="27431" y="191932"/>
                   </a:moveTo>
                   <a:lnTo>
                     <a:pt x="530900" y="191932"/>
@@ -57035,7 +56895,7 @@
                     <a:pt x="530900" y="0"/>
                   </a:lnTo>
                   <a:lnTo>
-                    <a:pt x="27432" y="0"/>
+                    <a:pt x="27431" y="0"/>
                   </a:lnTo>
                   <a:lnTo>
                     <a:pt x="30738" y="200"/>
@@ -57050,7 +56910,7 @@
                     <a:pt x="17704" y="1782"/>
                   </a:lnTo>
                   <a:lnTo>
-                    <a:pt x="13716" y="3675"/>
+                    <a:pt x="13715" y="3675"/>
                   </a:lnTo>
                   <a:lnTo>
                     <a:pt x="10082" y="6183"/>
@@ -57098,7 +56958,7 @@
                     <a:pt x="10082" y="185749"/>
                   </a:lnTo>
                   <a:lnTo>
-                    <a:pt x="13716" y="188257"/>
+                    <a:pt x="13715" y="188257"/>
                   </a:lnTo>
                   <a:lnTo>
                     <a:pt x="17704" y="190149"/>
@@ -57136,13 +56996,13 @@
         </p:sp>
         <p:sp>
           <p:nvSpPr>
-            <p:cNvPr id="1557" name="tx1557"/>
-            <p:cNvSpPr/>
-            <p:nvPr/>
-          </p:nvSpPr>
-          <p:spPr>
-            <a:xfrm>
-              <a:off x="5624619" y="2468809"/>
+            <p:cNvPr id="1553" name="tx1553"/>
+            <p:cNvSpPr/>
+            <p:nvPr/>
+          </p:nvSpPr>
+          <p:spPr>
+            <a:xfrm>
+              <a:off x="5618537" y="2469935"/>
               <a:ext cx="466892" cy="100492"/>
             </a:xfrm>
             <a:prstGeom prst="rect">
@@ -57182,7 +57042,7 @@
         </p:sp>
         <p:sp>
           <p:nvSpPr>
-            <p:cNvPr id="1558" name="pl1558"/>
+            <p:cNvPr id="1554" name="pl1554"/>
             <p:cNvSpPr/>
             <p:nvPr/>
           </p:nvSpPr>
@@ -57222,7 +57082,7 @@
         </p:sp>
         <p:sp>
           <p:nvSpPr>
-            <p:cNvPr id="1559" name="tx1559"/>
+            <p:cNvPr id="1555" name="tx1555"/>
             <p:cNvSpPr/>
             <p:nvPr/>
           </p:nvSpPr>
@@ -57268,7 +57128,7 @@
         </p:sp>
         <p:sp>
           <p:nvSpPr>
-            <p:cNvPr id="1560" name="tx1560"/>
+            <p:cNvPr id="1556" name="tx1556"/>
             <p:cNvSpPr/>
             <p:nvPr/>
           </p:nvSpPr>
@@ -57314,7 +57174,7 @@
         </p:sp>
         <p:sp>
           <p:nvSpPr>
-            <p:cNvPr id="1561" name="tx1561"/>
+            <p:cNvPr id="1557" name="tx1557"/>
             <p:cNvSpPr/>
             <p:nvPr/>
           </p:nvSpPr>
@@ -57360,7 +57220,7 @@
         </p:sp>
         <p:sp>
           <p:nvSpPr>
-            <p:cNvPr id="1562" name="tx1562"/>
+            <p:cNvPr id="1558" name="tx1558"/>
             <p:cNvSpPr/>
             <p:nvPr/>
           </p:nvSpPr>
@@ -57406,7 +57266,7 @@
         </p:sp>
         <p:sp>
           <p:nvSpPr>
-            <p:cNvPr id="1563" name="tx1563"/>
+            <p:cNvPr id="1559" name="tx1559"/>
             <p:cNvSpPr/>
             <p:nvPr/>
           </p:nvSpPr>
@@ -57452,7 +57312,7 @@
         </p:sp>
         <p:sp>
           <p:nvSpPr>
-            <p:cNvPr id="1564" name="tx1564"/>
+            <p:cNvPr id="1560" name="tx1560"/>
             <p:cNvSpPr/>
             <p:nvPr/>
           </p:nvSpPr>
@@ -57498,7 +57358,7 @@
         </p:sp>
         <p:sp>
           <p:nvSpPr>
-            <p:cNvPr id="1565" name="tx1565"/>
+            <p:cNvPr id="1561" name="tx1561"/>
             <p:cNvSpPr/>
             <p:nvPr/>
           </p:nvSpPr>
@@ -57544,7 +57404,7 @@
         </p:sp>
         <p:sp>
           <p:nvSpPr>
-            <p:cNvPr id="1566" name="tx1566"/>
+            <p:cNvPr id="1562" name="tx1562"/>
             <p:cNvSpPr/>
             <p:nvPr/>
           </p:nvSpPr>
@@ -57590,7 +57450,7 @@
         </p:sp>
         <p:sp>
           <p:nvSpPr>
-            <p:cNvPr id="1567" name="tx1567"/>
+            <p:cNvPr id="1563" name="tx1563"/>
             <p:cNvSpPr/>
             <p:nvPr/>
           </p:nvSpPr>
@@ -57636,7 +57496,7 @@
         </p:sp>
         <p:sp>
           <p:nvSpPr>
-            <p:cNvPr id="1568" name="tx1568"/>
+            <p:cNvPr id="1564" name="tx1564"/>
             <p:cNvSpPr/>
             <p:nvPr/>
           </p:nvSpPr>
@@ -57682,7 +57542,7 @@
         </p:sp>
         <p:sp>
           <p:nvSpPr>
-            <p:cNvPr id="1569" name="tx1569"/>
+            <p:cNvPr id="1565" name="tx1565"/>
             <p:cNvSpPr/>
             <p:nvPr/>
           </p:nvSpPr>
@@ -57728,7 +57588,7 @@
         </p:sp>
         <p:sp>
           <p:nvSpPr>
-            <p:cNvPr id="1570" name="tx1570"/>
+            <p:cNvPr id="1566" name="tx1566"/>
             <p:cNvSpPr/>
             <p:nvPr/>
           </p:nvSpPr>
@@ -57774,7 +57634,7 @@
         </p:sp>
         <p:sp>
           <p:nvSpPr>
-            <p:cNvPr id="1571" name="tx1571"/>
+            <p:cNvPr id="1567" name="tx1567"/>
             <p:cNvSpPr/>
             <p:nvPr/>
           </p:nvSpPr>
@@ -57820,7 +57680,7 @@
         </p:sp>
         <p:sp>
           <p:nvSpPr>
-            <p:cNvPr id="1572" name="tx1572"/>
+            <p:cNvPr id="1568" name="tx1568"/>
             <p:cNvSpPr/>
             <p:nvPr/>
           </p:nvSpPr>
@@ -57866,7 +57726,7 @@
         </p:sp>
         <p:sp>
           <p:nvSpPr>
-            <p:cNvPr id="1573" name="tx1573"/>
+            <p:cNvPr id="1569" name="tx1569"/>
             <p:cNvSpPr/>
             <p:nvPr/>
           </p:nvSpPr>
@@ -57912,7 +57772,7 @@
         </p:sp>
         <p:sp>
           <p:nvSpPr>
-            <p:cNvPr id="1574" name="tx1574"/>
+            <p:cNvPr id="1570" name="tx1570"/>
             <p:cNvSpPr/>
             <p:nvPr/>
           </p:nvSpPr>
@@ -57958,7 +57818,7 @@
         </p:sp>
         <p:sp>
           <p:nvSpPr>
-            <p:cNvPr id="1575" name="tx1575"/>
+            <p:cNvPr id="1571" name="tx1571"/>
             <p:cNvSpPr/>
             <p:nvPr/>
           </p:nvSpPr>
@@ -58004,7 +57864,7 @@
         </p:sp>
         <p:sp>
           <p:nvSpPr>
-            <p:cNvPr id="1576" name="tx1576"/>
+            <p:cNvPr id="1572" name="tx1572"/>
             <p:cNvSpPr/>
             <p:nvPr/>
           </p:nvSpPr>
@@ -58050,7 +57910,7 @@
         </p:sp>
         <p:sp>
           <p:nvSpPr>
-            <p:cNvPr id="1577" name="pl1577"/>
+            <p:cNvPr id="1573" name="pl1573"/>
             <p:cNvSpPr/>
             <p:nvPr/>
           </p:nvSpPr>
@@ -58090,7 +57950,7 @@
         </p:sp>
         <p:sp>
           <p:nvSpPr>
-            <p:cNvPr id="1578" name="pl1578"/>
+            <p:cNvPr id="1574" name="pl1574"/>
             <p:cNvSpPr/>
             <p:nvPr/>
           </p:nvSpPr>
@@ -58130,7 +57990,7 @@
         </p:sp>
         <p:sp>
           <p:nvSpPr>
-            <p:cNvPr id="1579" name="pl1579"/>
+            <p:cNvPr id="1575" name="pl1575"/>
             <p:cNvSpPr/>
             <p:nvPr/>
           </p:nvSpPr>
@@ -58170,7 +58030,7 @@
         </p:sp>
         <p:sp>
           <p:nvSpPr>
-            <p:cNvPr id="1580" name="pl1580"/>
+            <p:cNvPr id="1576" name="pl1576"/>
             <p:cNvSpPr/>
             <p:nvPr/>
           </p:nvSpPr>
@@ -58210,7 +58070,7 @@
         </p:sp>
         <p:sp>
           <p:nvSpPr>
-            <p:cNvPr id="1581" name="pl1581"/>
+            <p:cNvPr id="1577" name="pl1577"/>
             <p:cNvSpPr/>
             <p:nvPr/>
           </p:nvSpPr>
@@ -58250,7 +58110,7 @@
         </p:sp>
         <p:sp>
           <p:nvSpPr>
-            <p:cNvPr id="1582" name="pl1582"/>
+            <p:cNvPr id="1578" name="pl1578"/>
             <p:cNvSpPr/>
             <p:nvPr/>
           </p:nvSpPr>
@@ -58290,7 +58150,7 @@
         </p:sp>
         <p:sp>
           <p:nvSpPr>
-            <p:cNvPr id="1583" name="pl1583"/>
+            <p:cNvPr id="1579" name="pl1579"/>
             <p:cNvSpPr/>
             <p:nvPr/>
           </p:nvSpPr>
@@ -58330,7 +58190,7 @@
         </p:sp>
         <p:sp>
           <p:nvSpPr>
-            <p:cNvPr id="1584" name="pl1584"/>
+            <p:cNvPr id="1580" name="pl1580"/>
             <p:cNvSpPr/>
             <p:nvPr/>
           </p:nvSpPr>
@@ -58370,7 +58230,7 @@
         </p:sp>
         <p:sp>
           <p:nvSpPr>
-            <p:cNvPr id="1585" name="pl1585"/>
+            <p:cNvPr id="1581" name="pl1581"/>
             <p:cNvSpPr/>
             <p:nvPr/>
           </p:nvSpPr>
@@ -58410,7 +58270,7 @@
         </p:sp>
         <p:sp>
           <p:nvSpPr>
-            <p:cNvPr id="1586" name="pl1586"/>
+            <p:cNvPr id="1582" name="pl1582"/>
             <p:cNvSpPr/>
             <p:nvPr/>
           </p:nvSpPr>
@@ -58450,7 +58310,7 @@
         </p:sp>
         <p:sp>
           <p:nvSpPr>
-            <p:cNvPr id="1587" name="pl1587"/>
+            <p:cNvPr id="1583" name="pl1583"/>
             <p:cNvSpPr/>
             <p:nvPr/>
           </p:nvSpPr>
@@ -58490,7 +58350,7 @@
         </p:sp>
         <p:sp>
           <p:nvSpPr>
-            <p:cNvPr id="1588" name="pl1588"/>
+            <p:cNvPr id="1584" name="pl1584"/>
             <p:cNvSpPr/>
             <p:nvPr/>
           </p:nvSpPr>
@@ -58530,7 +58390,7 @@
         </p:sp>
         <p:sp>
           <p:nvSpPr>
-            <p:cNvPr id="1589" name="pl1589"/>
+            <p:cNvPr id="1585" name="pl1585"/>
             <p:cNvSpPr/>
             <p:nvPr/>
           </p:nvSpPr>
@@ -58570,7 +58430,7 @@
         </p:sp>
         <p:sp>
           <p:nvSpPr>
-            <p:cNvPr id="1590" name="pl1590"/>
+            <p:cNvPr id="1586" name="pl1586"/>
             <p:cNvSpPr/>
             <p:nvPr/>
           </p:nvSpPr>
@@ -58610,7 +58470,7 @@
         </p:sp>
         <p:sp>
           <p:nvSpPr>
-            <p:cNvPr id="1591" name="pl1591"/>
+            <p:cNvPr id="1587" name="pl1587"/>
             <p:cNvSpPr/>
             <p:nvPr/>
           </p:nvSpPr>
@@ -58650,7 +58510,7 @@
         </p:sp>
         <p:sp>
           <p:nvSpPr>
-            <p:cNvPr id="1592" name="pl1592"/>
+            <p:cNvPr id="1588" name="pl1588"/>
             <p:cNvSpPr/>
             <p:nvPr/>
           </p:nvSpPr>
@@ -58690,7 +58550,7 @@
         </p:sp>
         <p:sp>
           <p:nvSpPr>
-            <p:cNvPr id="1593" name="tx1593"/>
+            <p:cNvPr id="1589" name="tx1589"/>
             <p:cNvSpPr/>
             <p:nvPr/>
           </p:nvSpPr>
@@ -58736,7 +58596,7 @@
         </p:sp>
         <p:sp>
           <p:nvSpPr>
-            <p:cNvPr id="1594" name="tx1594"/>
+            <p:cNvPr id="1590" name="tx1590"/>
             <p:cNvSpPr/>
             <p:nvPr/>
           </p:nvSpPr>
@@ -58782,7 +58642,7 @@
         </p:sp>
         <p:sp>
           <p:nvSpPr>
-            <p:cNvPr id="1595" name="tx1595"/>
+            <p:cNvPr id="1591" name="tx1591"/>
             <p:cNvSpPr/>
             <p:nvPr/>
           </p:nvSpPr>
@@ -58828,7 +58688,7 @@
         </p:sp>
         <p:sp>
           <p:nvSpPr>
-            <p:cNvPr id="1596" name="tx1596"/>
+            <p:cNvPr id="1592" name="tx1592"/>
             <p:cNvSpPr/>
             <p:nvPr/>
           </p:nvSpPr>
@@ -58874,7 +58734,7 @@
         </p:sp>
         <p:sp>
           <p:nvSpPr>
-            <p:cNvPr id="1597" name="tx1597"/>
+            <p:cNvPr id="1593" name="tx1593"/>
             <p:cNvSpPr/>
             <p:nvPr/>
           </p:nvSpPr>
@@ -58920,7 +58780,7 @@
         </p:sp>
         <p:sp>
           <p:nvSpPr>
-            <p:cNvPr id="1598" name="tx1598"/>
+            <p:cNvPr id="1594" name="tx1594"/>
             <p:cNvSpPr/>
             <p:nvPr/>
           </p:nvSpPr>
@@ -58966,7 +58826,7 @@
         </p:sp>
         <p:sp>
           <p:nvSpPr>
-            <p:cNvPr id="1599" name="tx1599"/>
+            <p:cNvPr id="1595" name="tx1595"/>
             <p:cNvSpPr/>
             <p:nvPr/>
           </p:nvSpPr>
@@ -59012,7 +58872,7 @@
         </p:sp>
         <p:sp>
           <p:nvSpPr>
-            <p:cNvPr id="1600" name="tx1600"/>
+            <p:cNvPr id="1596" name="tx1596"/>
             <p:cNvSpPr/>
             <p:nvPr/>
           </p:nvSpPr>
@@ -59058,7 +58918,7 @@
         </p:sp>
         <p:sp>
           <p:nvSpPr>
-            <p:cNvPr id="1601" name="tx1601"/>
+            <p:cNvPr id="1597" name="tx1597"/>
             <p:cNvSpPr/>
             <p:nvPr/>
           </p:nvSpPr>
@@ -59104,7 +58964,7 @@
         </p:sp>
         <p:sp>
           <p:nvSpPr>
-            <p:cNvPr id="1602" name="tx1602"/>
+            <p:cNvPr id="1598" name="tx1598"/>
             <p:cNvSpPr/>
             <p:nvPr/>
           </p:nvSpPr>
@@ -59150,7 +59010,7 @@
         </p:sp>
         <p:sp>
           <p:nvSpPr>
-            <p:cNvPr id="1603" name="tx1603"/>
+            <p:cNvPr id="1599" name="tx1599"/>
             <p:cNvSpPr/>
             <p:nvPr/>
           </p:nvSpPr>
@@ -59196,7 +59056,7 @@
         </p:sp>
         <p:sp>
           <p:nvSpPr>
-            <p:cNvPr id="1604" name="tx1604"/>
+            <p:cNvPr id="1600" name="tx1600"/>
             <p:cNvSpPr/>
             <p:nvPr/>
           </p:nvSpPr>
@@ -59242,7 +59102,7 @@
         </p:sp>
         <p:sp>
           <p:nvSpPr>
-            <p:cNvPr id="1605" name="tx1605"/>
+            <p:cNvPr id="1601" name="tx1601"/>
             <p:cNvSpPr/>
             <p:nvPr/>
           </p:nvSpPr>
@@ -59288,7 +59148,7 @@
         </p:sp>
         <p:sp>
           <p:nvSpPr>
-            <p:cNvPr id="1606" name="tx1606"/>
+            <p:cNvPr id="1602" name="tx1602"/>
             <p:cNvSpPr/>
             <p:nvPr/>
           </p:nvSpPr>
@@ -59334,7 +59194,7 @@
         </p:sp>
         <p:sp>
           <p:nvSpPr>
-            <p:cNvPr id="1607" name="tx1607"/>
+            <p:cNvPr id="1603" name="tx1603"/>
             <p:cNvSpPr/>
             <p:nvPr/>
           </p:nvSpPr>
@@ -59380,7 +59240,7 @@
         </p:sp>
         <p:sp>
           <p:nvSpPr>
-            <p:cNvPr id="1608" name="tx1608"/>
+            <p:cNvPr id="1604" name="tx1604"/>
             <p:cNvSpPr/>
             <p:nvPr/>
           </p:nvSpPr>
@@ -59426,7 +59286,7 @@
         </p:sp>
         <p:sp>
           <p:nvSpPr>
-            <p:cNvPr id="1609" name="tx1609"/>
+            <p:cNvPr id="1605" name="tx1605"/>
             <p:cNvSpPr/>
             <p:nvPr/>
           </p:nvSpPr>
@@ -59472,7 +59332,7 @@
         </p:sp>
         <p:sp>
           <p:nvSpPr>
-            <p:cNvPr id="1610" name="tx1610"/>
+            <p:cNvPr id="1606" name="tx1606"/>
             <p:cNvSpPr/>
             <p:nvPr/>
           </p:nvSpPr>
@@ -59518,7 +59378,7 @@
         </p:sp>
         <p:sp>
           <p:nvSpPr>
-            <p:cNvPr id="1611" name="tx1611"/>
+            <p:cNvPr id="1607" name="tx1607"/>
             <p:cNvSpPr/>
             <p:nvPr/>
           </p:nvSpPr>
@@ -59564,7 +59424,7 @@
         </p:sp>
         <p:sp>
           <p:nvSpPr>
-            <p:cNvPr id="1612" name="tx1612"/>
+            <p:cNvPr id="1608" name="tx1608"/>
             <p:cNvSpPr/>
             <p:nvPr/>
           </p:nvSpPr>
@@ -59610,7 +59470,7 @@
         </p:sp>
         <p:sp>
           <p:nvSpPr>
-            <p:cNvPr id="1613" name="tx1613"/>
+            <p:cNvPr id="1609" name="tx1609"/>
             <p:cNvSpPr/>
             <p:nvPr/>
           </p:nvSpPr>
@@ -59656,7 +59516,7 @@
         </p:sp>
         <p:sp>
           <p:nvSpPr>
-            <p:cNvPr id="1614" name="tx1614"/>
+            <p:cNvPr id="1610" name="tx1610"/>
             <p:cNvSpPr/>
             <p:nvPr/>
           </p:nvSpPr>
@@ -59702,7 +59562,7 @@
         </p:sp>
         <p:sp>
           <p:nvSpPr>
-            <p:cNvPr id="1615" name="tx1615"/>
+            <p:cNvPr id="1611" name="tx1611"/>
             <p:cNvSpPr/>
             <p:nvPr/>
           </p:nvSpPr>
@@ -59748,7 +59608,7 @@
         </p:sp>
         <p:sp>
           <p:nvSpPr>
-            <p:cNvPr id="1616" name="tx1616"/>
+            <p:cNvPr id="1612" name="tx1612"/>
             <p:cNvSpPr/>
             <p:nvPr/>
           </p:nvSpPr>
@@ -59794,7 +59654,7 @@
         </p:sp>
         <p:sp>
           <p:nvSpPr>
-            <p:cNvPr id="1617" name="tx1617"/>
+            <p:cNvPr id="1613" name="tx1613"/>
             <p:cNvSpPr/>
             <p:nvPr/>
           </p:nvSpPr>
@@ -59840,7 +59700,7 @@
         </p:sp>
         <p:sp>
           <p:nvSpPr>
-            <p:cNvPr id="1618" name="tx1618"/>
+            <p:cNvPr id="1614" name="tx1614"/>
             <p:cNvSpPr/>
             <p:nvPr/>
           </p:nvSpPr>
@@ -59886,7 +59746,7 @@
         </p:sp>
         <p:sp>
           <p:nvSpPr>
-            <p:cNvPr id="1619" name="tx1619"/>
+            <p:cNvPr id="1615" name="tx1615"/>
             <p:cNvSpPr/>
             <p:nvPr/>
           </p:nvSpPr>
@@ -59932,7 +59792,7 @@
         </p:sp>
         <p:sp>
           <p:nvSpPr>
-            <p:cNvPr id="1620" name="tx1620"/>
+            <p:cNvPr id="1616" name="tx1616"/>
             <p:cNvSpPr/>
             <p:nvPr/>
           </p:nvSpPr>
@@ -59978,7 +59838,7 @@
         </p:sp>
         <p:sp>
           <p:nvSpPr>
-            <p:cNvPr id="1621" name="tx1621"/>
+            <p:cNvPr id="1617" name="tx1617"/>
             <p:cNvSpPr/>
             <p:nvPr/>
           </p:nvSpPr>
@@ -60024,7 +59884,7 @@
         </p:sp>
         <p:sp>
           <p:nvSpPr>
-            <p:cNvPr id="1622" name="tx1622"/>
+            <p:cNvPr id="1618" name="tx1618"/>
             <p:cNvSpPr/>
             <p:nvPr/>
           </p:nvSpPr>
@@ -60070,7 +59930,7 @@
         </p:sp>
         <p:sp>
           <p:nvSpPr>
-            <p:cNvPr id="1623" name="tx1623"/>
+            <p:cNvPr id="1619" name="tx1619"/>
             <p:cNvSpPr/>
             <p:nvPr/>
           </p:nvSpPr>
@@ -60372,16 +60232,19 @@
           <p:spPr>
             <a:xfrm>
               <a:off x="3147820" y="5516533"/>
-              <a:ext cx="101935" cy="186280"/>
+              <a:ext cx="132471" cy="204506"/>
             </a:xfrm>
             <a:custGeom>
               <a:avLst/>
               <a:pathLst>
-                <a:path w="101935" h="186280">
+                <a:path w="132471" h="204506">
                   <a:moveTo>
-                    <a:pt x="15596" y="186280"/>
+                    <a:pt x="15317" y="204506"/>
                   </a:moveTo>
                   <a:lnTo>
+                    <a:pt x="16373" y="190905"/>
+                  </a:lnTo>
+                  <a:lnTo>
                     <a:pt x="0" y="93523"/>
                   </a:lnTo>
                   <a:lnTo>
@@ -60394,7 +60257,10 @@
                     <a:pt x="47017" y="150123"/>
                   </a:lnTo>
                   <a:lnTo>
-                    <a:pt x="101935" y="185048"/>
+                    <a:pt x="132471" y="204506"/>
+                  </a:lnTo>
+                  <a:lnTo>
+                    <a:pt x="132471" y="204506"/>
                   </a:lnTo>
                 </a:path>
               </a:pathLst>
@@ -60423,99 +60289,105 @@
           </p:nvSpPr>
           <p:spPr>
             <a:xfrm>
-              <a:off x="3362218" y="5097035"/>
-              <a:ext cx="592216" cy="603094"/>
+              <a:off x="3307155" y="5097035"/>
+              <a:ext cx="660121" cy="624003"/>
             </a:xfrm>
             <a:custGeom>
               <a:avLst/>
               <a:pathLst>
-                <a:path w="592216" h="603094">
+                <a:path w="660121" h="624003">
                   <a:moveTo>
-                    <a:pt x="0" y="603094"/>
+                    <a:pt x="0" y="624003"/>
                   </a:moveTo>
                   <a:lnTo>
-                    <a:pt x="28424" y="576766"/>
-                  </a:lnTo>
-                  <a:lnTo>
-                    <a:pt x="59668" y="512782"/>
-                  </a:lnTo>
-                  <a:lnTo>
-                    <a:pt x="107737" y="508256"/>
-                  </a:lnTo>
-                  <a:lnTo>
-                    <a:pt x="179878" y="529886"/>
-                  </a:lnTo>
-                  <a:lnTo>
-                    <a:pt x="146643" y="457802"/>
-                  </a:lnTo>
-                  <a:lnTo>
-                    <a:pt x="184197" y="480241"/>
-                  </a:lnTo>
-                  <a:lnTo>
-                    <a:pt x="239401" y="500871"/>
-                  </a:lnTo>
-                  <a:lnTo>
-                    <a:pt x="246273" y="433218"/>
-                  </a:lnTo>
-                  <a:lnTo>
-                    <a:pt x="241053" y="370567"/>
-                  </a:lnTo>
-                  <a:lnTo>
-                    <a:pt x="312668" y="414256"/>
-                  </a:lnTo>
-                  <a:lnTo>
-                    <a:pt x="393071" y="439173"/>
-                  </a:lnTo>
-                  <a:lnTo>
-                    <a:pt x="444745" y="471666"/>
-                  </a:lnTo>
-                  <a:lnTo>
-                    <a:pt x="493152" y="532982"/>
-                  </a:lnTo>
-                  <a:lnTo>
-                    <a:pt x="457363" y="381716"/>
-                  </a:lnTo>
-                  <a:lnTo>
-                    <a:pt x="412561" y="269373"/>
-                  </a:lnTo>
-                  <a:lnTo>
-                    <a:pt x="371327" y="224351"/>
-                  </a:lnTo>
-                  <a:lnTo>
-                    <a:pt x="360324" y="180805"/>
-                  </a:lnTo>
-                  <a:lnTo>
-                    <a:pt x="380566" y="105100"/>
-                  </a:lnTo>
-                  <a:lnTo>
-                    <a:pt x="385711" y="85900"/>
-                  </a:lnTo>
-                  <a:lnTo>
-                    <a:pt x="375195" y="57695"/>
-                  </a:lnTo>
-                  <a:lnTo>
-                    <a:pt x="381429" y="20962"/>
-                  </a:lnTo>
-                  <a:lnTo>
-                    <a:pt x="395925" y="0"/>
-                  </a:lnTo>
-                  <a:lnTo>
-                    <a:pt x="417932" y="25774"/>
-                  </a:lnTo>
-                  <a:lnTo>
-                    <a:pt x="436633" y="90331"/>
-                  </a:lnTo>
-                  <a:lnTo>
-                    <a:pt x="440088" y="105958"/>
-                  </a:lnTo>
-                  <a:lnTo>
-                    <a:pt x="501076" y="378619"/>
-                  </a:lnTo>
-                  <a:lnTo>
-                    <a:pt x="563791" y="541892"/>
-                  </a:lnTo>
-                  <a:lnTo>
-                    <a:pt x="592216" y="598311"/>
+                    <a:pt x="41577" y="615595"/>
+                  </a:lnTo>
+                  <a:lnTo>
+                    <a:pt x="83487" y="576766"/>
+                  </a:lnTo>
+                  <a:lnTo>
+                    <a:pt x="114732" y="512782"/>
+                  </a:lnTo>
+                  <a:lnTo>
+                    <a:pt x="162801" y="508256"/>
+                  </a:lnTo>
+                  <a:lnTo>
+                    <a:pt x="234942" y="529886"/>
+                  </a:lnTo>
+                  <a:lnTo>
+                    <a:pt x="201707" y="457802"/>
+                  </a:lnTo>
+                  <a:lnTo>
+                    <a:pt x="239260" y="480241"/>
+                  </a:lnTo>
+                  <a:lnTo>
+                    <a:pt x="294464" y="500871"/>
+                  </a:lnTo>
+                  <a:lnTo>
+                    <a:pt x="301337" y="433218"/>
+                  </a:lnTo>
+                  <a:lnTo>
+                    <a:pt x="296117" y="370567"/>
+                  </a:lnTo>
+                  <a:lnTo>
+                    <a:pt x="367732" y="414256"/>
+                  </a:lnTo>
+                  <a:lnTo>
+                    <a:pt x="448135" y="439173"/>
+                  </a:lnTo>
+                  <a:lnTo>
+                    <a:pt x="499809" y="471666"/>
+                  </a:lnTo>
+                  <a:lnTo>
+                    <a:pt x="548215" y="532982"/>
+                  </a:lnTo>
+                  <a:lnTo>
+                    <a:pt x="512427" y="381716"/>
+                  </a:lnTo>
+                  <a:lnTo>
+                    <a:pt x="467625" y="269373"/>
+                  </a:lnTo>
+                  <a:lnTo>
+                    <a:pt x="426391" y="224351"/>
+                  </a:lnTo>
+                  <a:lnTo>
+                    <a:pt x="415388" y="180805"/>
+                  </a:lnTo>
+                  <a:lnTo>
+                    <a:pt x="435629" y="105100"/>
+                  </a:lnTo>
+                  <a:lnTo>
+                    <a:pt x="440774" y="85900"/>
+                  </a:lnTo>
+                  <a:lnTo>
+                    <a:pt x="430259" y="57695"/>
+                  </a:lnTo>
+                  <a:lnTo>
+                    <a:pt x="436493" y="20962"/>
+                  </a:lnTo>
+                  <a:lnTo>
+                    <a:pt x="450989" y="0"/>
+                  </a:lnTo>
+                  <a:lnTo>
+                    <a:pt x="472995" y="25774"/>
+                  </a:lnTo>
+                  <a:lnTo>
+                    <a:pt x="491697" y="90331"/>
+                  </a:lnTo>
+                  <a:lnTo>
+                    <a:pt x="495152" y="105958"/>
+                  </a:lnTo>
+                  <a:lnTo>
+                    <a:pt x="556139" y="378619"/>
+                  </a:lnTo>
+                  <a:lnTo>
+                    <a:pt x="618854" y="541892"/>
+                  </a:lnTo>
+                  <a:lnTo>
+                    <a:pt x="660121" y="624003"/>
+                  </a:lnTo>
+                  <a:lnTo>
+                    <a:pt x="660121" y="624003"/>
                   </a:lnTo>
                 </a:path>
               </a:pathLst>
@@ -60545,14 +60417,14 @@
           <p:spPr>
             <a:xfrm>
               <a:off x="2706637" y="1896563"/>
-              <a:ext cx="1751847" cy="3798672"/>
+              <a:ext cx="1751847" cy="3824476"/>
             </a:xfrm>
             <a:custGeom>
               <a:avLst/>
               <a:pathLst>
-                <a:path w="1751847" h="3798672">
+                <a:path w="1751847" h="3824476">
                   <a:moveTo>
-                    <a:pt x="1276986" y="3798672"/>
+                    <a:pt x="1288376" y="3824476"/>
                   </a:moveTo>
                   <a:lnTo>
                     <a:pt x="1196576" y="3619874"/>
@@ -61320,7 +61192,10 @@
                     <a:pt x="1646433" y="43310"/>
                   </a:lnTo>
                   <a:lnTo>
-                    <a:pt x="1684430" y="0"/>
+                    <a:pt x="1684442" y="0"/>
+                  </a:lnTo>
+                  <a:lnTo>
+                    <a:pt x="1684442" y="0"/>
                   </a:lnTo>
                 </a:path>
               </a:pathLst>
@@ -61357,7 +61232,7 @@
               <a:pathLst>
                 <a:path w="1082264" h="973826">
                   <a:moveTo>
-                    <a:pt x="326570" y="0"/>
+                    <a:pt x="326571" y="0"/>
                   </a:moveTo>
                   <a:lnTo>
                     <a:pt x="323338" y="7149"/>
@@ -61454,6 +61329,9 @@
                   </a:lnTo>
                   <a:lnTo>
                     <a:pt x="1081812" y="1003"/>
+                  </a:lnTo>
+                  <a:lnTo>
+                    <a:pt x="1082264" y="0"/>
                   </a:lnTo>
                   <a:lnTo>
                     <a:pt x="1082264" y="0"/>
@@ -61486,14 +61364,14 @@
           <p:spPr>
             <a:xfrm>
               <a:off x="5190596" y="1896563"/>
-              <a:ext cx="28664" cy="147362"/>
+              <a:ext cx="28666" cy="147362"/>
             </a:xfrm>
             <a:custGeom>
               <a:avLst/>
               <a:pathLst>
-                <a:path w="28664" h="147362">
+                <a:path w="28666" h="147362">
                   <a:moveTo>
-                    <a:pt x="9999" y="0"/>
+                    <a:pt x="10004" y="0"/>
                   </a:moveTo>
                   <a:lnTo>
                     <a:pt x="0" y="107390"/>
@@ -61505,7 +61383,10 @@
                     <a:pt x="26963" y="15724"/>
                   </a:lnTo>
                   <a:lnTo>
-                    <a:pt x="28664" y="0"/>
+                    <a:pt x="28666" y="0"/>
+                  </a:lnTo>
+                  <a:lnTo>
+                    <a:pt x="28666" y="0"/>
                   </a:lnTo>
                 </a:path>
               </a:pathLst>
@@ -61948,14 +61829,14 @@
           <p:spPr>
             <a:xfrm>
               <a:off x="3376095" y="3807884"/>
-              <a:ext cx="420893" cy="2"/>
+              <a:ext cx="420896" cy="0"/>
             </a:xfrm>
             <a:custGeom>
               <a:avLst/>
               <a:pathLst>
-                <a:path w="420893" h="2">
+                <a:path w="420896" h="0">
                   <a:moveTo>
-                    <a:pt x="420893" y="2"/>
+                    <a:pt x="420896" y="0"/>
                   </a:moveTo>
                   <a:lnTo>
                     <a:pt x="0" y="0"/>
@@ -61988,14 +61869,14 @@
           <p:spPr>
             <a:xfrm>
               <a:off x="3347277" y="4523109"/>
-              <a:ext cx="409282" cy="1"/>
+              <a:ext cx="409280" cy="2"/>
             </a:xfrm>
             <a:custGeom>
               <a:avLst/>
               <a:pathLst>
-                <a:path w="409282" h="1">
+                <a:path w="409280" h="2">
                   <a:moveTo>
-                    <a:pt x="409282" y="1"/>
+                    <a:pt x="409280" y="2"/>
                   </a:moveTo>
                   <a:lnTo>
                     <a:pt x="0" y="0"/>
@@ -62027,7 +61908,7 @@
           </p:nvSpPr>
           <p:spPr>
             <a:xfrm>
-              <a:off x="3796988" y="3711920"/>
+              <a:off x="3796991" y="3711918"/>
               <a:ext cx="667694" cy="191932"/>
             </a:xfrm>
             <a:custGeom>
@@ -62035,7 +61916,7 @@
               <a:pathLst>
                 <a:path w="667694" h="191932">
                   <a:moveTo>
-                    <a:pt x="27431" y="191932"/>
+                    <a:pt x="27432" y="191932"/>
                   </a:moveTo>
                   <a:lnTo>
                     <a:pt x="640262" y="191932"/>
@@ -62074,7 +61955,7 @@
                     <a:pt x="667694" y="164500"/>
                   </a:lnTo>
                   <a:lnTo>
-                    <a:pt x="667694" y="27432"/>
+                    <a:pt x="667694" y="27431"/>
                   </a:lnTo>
                   <a:lnTo>
                     <a:pt x="667339" y="23031"/>
@@ -62107,7 +61988,7 @@
                     <a:pt x="640262" y="0"/>
                   </a:lnTo>
                   <a:lnTo>
-                    <a:pt x="27431" y="0"/>
+                    <a:pt x="27432" y="0"/>
                   </a:lnTo>
                   <a:lnTo>
                     <a:pt x="30738" y="200"/>
@@ -62143,7 +62024,7 @@
                     <a:pt x="88" y="25224"/>
                   </a:lnTo>
                   <a:lnTo>
-                    <a:pt x="0" y="27432"/>
+                    <a:pt x="0" y="27431"/>
                   </a:lnTo>
                   <a:lnTo>
                     <a:pt x="0" y="164500"/>
@@ -62214,7 +62095,7 @@
           </p:nvSpPr>
           <p:spPr>
             <a:xfrm>
-              <a:off x="3842708" y="3757640"/>
+              <a:off x="3842711" y="3757638"/>
               <a:ext cx="576254" cy="100492"/>
             </a:xfrm>
             <a:prstGeom prst="rect">
@@ -62260,7 +62141,7 @@
           </p:nvSpPr>
           <p:spPr>
             <a:xfrm>
-              <a:off x="3756560" y="4427144"/>
+              <a:off x="3756558" y="4427146"/>
               <a:ext cx="690920" cy="191932"/>
             </a:xfrm>
             <a:custGeom>
@@ -62307,7 +62188,7 @@
                     <a:pt x="690920" y="164500"/>
                   </a:lnTo>
                   <a:lnTo>
-                    <a:pt x="690920" y="27432"/>
+                    <a:pt x="690920" y="27431"/>
                   </a:lnTo>
                   <a:lnTo>
                     <a:pt x="690565" y="23031"/>
@@ -62376,7 +62257,7 @@
                     <a:pt x="88" y="25224"/>
                   </a:lnTo>
                   <a:lnTo>
-                    <a:pt x="0" y="27432"/>
+                    <a:pt x="0" y="27431"/>
                   </a:lnTo>
                   <a:lnTo>
                     <a:pt x="0" y="164500"/>
@@ -62447,7 +62328,7 @@
           </p:nvSpPr>
           <p:spPr>
             <a:xfrm>
-              <a:off x="3802280" y="4472864"/>
+              <a:off x="3802278" y="4472866"/>
               <a:ext cx="599480" cy="100492"/>
             </a:xfrm>
             <a:prstGeom prst="rect">
@@ -62493,18 +62374,18 @@
           </p:nvSpPr>
           <p:spPr>
             <a:xfrm>
-              <a:off x="3049624" y="3651543"/>
-              <a:ext cx="185611" cy="147492"/>
+              <a:off x="3049619" y="3651547"/>
+              <a:ext cx="185616" cy="147488"/>
             </a:xfrm>
             <a:custGeom>
               <a:avLst/>
               <a:pathLst>
-                <a:path w="185611" h="147492">
+                <a:path w="185616" h="147488">
                   <a:moveTo>
                     <a:pt x="0" y="0"/>
                   </a:moveTo>
                   <a:lnTo>
-                    <a:pt x="185611" y="147492"/>
+                    <a:pt x="185616" y="147488"/>
                   </a:lnTo>
                 </a:path>
               </a:pathLst>
@@ -62533,18 +62414,18 @@
           </p:nvSpPr>
           <p:spPr>
             <a:xfrm>
-              <a:off x="3080122" y="4375697"/>
-              <a:ext cx="127767" cy="137046"/>
+              <a:off x="3080122" y="4375691"/>
+              <a:ext cx="127768" cy="137051"/>
             </a:xfrm>
             <a:custGeom>
               <a:avLst/>
               <a:pathLst>
-                <a:path w="127767" h="137046">
+                <a:path w="127768" h="137051">
                   <a:moveTo>
                     <a:pt x="0" y="0"/>
                   </a:moveTo>
                   <a:lnTo>
-                    <a:pt x="127767" y="137046"/>
+                    <a:pt x="127768" y="137051"/>
                   </a:lnTo>
                 </a:path>
               </a:pathLst>
@@ -62573,7 +62454,7 @@
           </p:nvSpPr>
           <p:spPr>
             <a:xfrm>
-              <a:off x="2366385" y="3536282"/>
+              <a:off x="2366379" y="3536287"/>
               <a:ext cx="683239" cy="191932"/>
             </a:xfrm>
             <a:custGeom>
@@ -62668,7 +62549,7 @@
                     <a:pt x="17704" y="1782"/>
                   </a:lnTo>
                   <a:lnTo>
-                    <a:pt x="13716" y="3675"/>
+                    <a:pt x="13715" y="3675"/>
                   </a:lnTo>
                   <a:lnTo>
                     <a:pt x="10082" y="6183"/>
@@ -62716,7 +62597,7 @@
                     <a:pt x="10082" y="185749"/>
                   </a:lnTo>
                   <a:lnTo>
-                    <a:pt x="13716" y="188257"/>
+                    <a:pt x="13715" y="188257"/>
                   </a:lnTo>
                   <a:lnTo>
                     <a:pt x="17704" y="190149"/>
@@ -62760,7 +62641,7 @@
           </p:nvSpPr>
           <p:spPr>
             <a:xfrm>
-              <a:off x="2412105" y="3582002"/>
+              <a:off x="2412099" y="3582007"/>
               <a:ext cx="591799" cy="100492"/>
             </a:xfrm>
             <a:prstGeom prst="rect">
@@ -62806,7 +62687,7 @@
           </p:nvSpPr>
           <p:spPr>
             <a:xfrm>
-              <a:off x="2334886" y="4251517"/>
+              <a:off x="2334886" y="4251511"/>
               <a:ext cx="745236" cy="191932"/>
             </a:xfrm>
             <a:custGeom>
@@ -62993,7 +62874,7 @@
           </p:nvSpPr>
           <p:spPr>
             <a:xfrm>
-              <a:off x="2380606" y="4297237"/>
+              <a:off x="2380606" y="4297231"/>
               <a:ext cx="653796" cy="100492"/>
             </a:xfrm>
             <a:prstGeom prst="rect">
@@ -63040,14 +62921,14 @@
           <p:spPr>
             <a:xfrm>
               <a:off x="3114115" y="4572330"/>
-              <a:ext cx="114587" cy="656102"/>
+              <a:ext cx="114586" cy="656103"/>
             </a:xfrm>
             <a:custGeom>
               <a:avLst/>
               <a:pathLst>
-                <a:path w="114587" h="656102">
+                <a:path w="114586" h="656103">
                   <a:moveTo>
-                    <a:pt x="114587" y="656102"/>
+                    <a:pt x="114586" y="656103"/>
                   </a:moveTo>
                   <a:lnTo>
                     <a:pt x="0" y="0"/>
@@ -63079,7 +62960,7 @@
           </p:nvSpPr>
           <p:spPr>
             <a:xfrm>
-              <a:off x="3228702" y="5145554"/>
+              <a:off x="3228702" y="5145555"/>
               <a:ext cx="535106" cy="191932"/>
             </a:xfrm>
             <a:custGeom>
@@ -63174,7 +63055,7 @@
                     <a:pt x="17704" y="1782"/>
                   </a:lnTo>
                   <a:lnTo>
-                    <a:pt x="13716" y="3675"/>
+                    <a:pt x="13715" y="3675"/>
                   </a:lnTo>
                   <a:lnTo>
                     <a:pt x="10082" y="6183"/>
@@ -63222,7 +63103,7 @@
                     <a:pt x="10082" y="185749"/>
                   </a:lnTo>
                   <a:lnTo>
-                    <a:pt x="13716" y="188257"/>
+                    <a:pt x="13715" y="188257"/>
                   </a:lnTo>
                   <a:lnTo>
                     <a:pt x="17704" y="190149"/>
@@ -63266,7 +63147,7 @@
           </p:nvSpPr>
           <p:spPr>
             <a:xfrm>
-              <a:off x="3274422" y="5191274"/>
+              <a:off x="3274422" y="5191275"/>
               <a:ext cx="443666" cy="100492"/>
             </a:xfrm>
             <a:prstGeom prst="rect">
